--- a/Teoria/ITN_Module_7.pptx
+++ b/Teoria/ITN_Module_7.pptx
@@ -2,62 +2,62 @@
 <file path=ppt/presentation.xml><?xml version="1.0" encoding="utf-8"?>
 <p:presentation xmlns:a="http://schemas.openxmlformats.org/drawingml/2006/main" xmlns:r="http://schemas.openxmlformats.org/officeDocument/2006/relationships" xmlns:p="http://schemas.openxmlformats.org/presentationml/2006/main" saveSubsetFonts="1" autoCompressPictures="0">
   <p:sldMasterIdLst>
-    <p:sldMasterId id="2147483700" r:id="rId1"/>
+    <p:sldMasterId id="2147483700" r:id="rId4"/>
   </p:sldMasterIdLst>
   <p:notesMasterIdLst>
-    <p:notesMasterId r:id="rId47"/>
+    <p:notesMasterId r:id="rId50"/>
   </p:notesMasterIdLst>
   <p:sldIdLst>
-    <p:sldId id="513" r:id="rId2"/>
-    <p:sldId id="730" r:id="rId3"/>
-    <p:sldId id="1070" r:id="rId4"/>
-    <p:sldId id="1071" r:id="rId5"/>
-    <p:sldId id="1053" r:id="rId6"/>
-    <p:sldId id="763" r:id="rId7"/>
-    <p:sldId id="1052" r:id="rId8"/>
-    <p:sldId id="1069" r:id="rId9"/>
-    <p:sldId id="876" r:id="rId10"/>
-    <p:sldId id="860" r:id="rId11"/>
-    <p:sldId id="759" r:id="rId12"/>
-    <p:sldId id="1054" r:id="rId13"/>
-    <p:sldId id="1107" r:id="rId14"/>
-    <p:sldId id="1108" r:id="rId15"/>
-    <p:sldId id="1128" r:id="rId16"/>
-    <p:sldId id="1109" r:id="rId17"/>
-    <p:sldId id="1123" r:id="rId18"/>
-    <p:sldId id="1056" r:id="rId19"/>
-    <p:sldId id="1097" r:id="rId20"/>
-    <p:sldId id="1110" r:id="rId21"/>
-    <p:sldId id="1111" r:id="rId22"/>
-    <p:sldId id="1112" r:id="rId23"/>
-    <p:sldId id="1113" r:id="rId24"/>
-    <p:sldId id="1114" r:id="rId25"/>
-    <p:sldId id="1124" r:id="rId26"/>
-    <p:sldId id="1103" r:id="rId27"/>
-    <p:sldId id="1115" r:id="rId28"/>
-    <p:sldId id="1116" r:id="rId29"/>
-    <p:sldId id="1130" r:id="rId30"/>
-    <p:sldId id="1117" r:id="rId31"/>
-    <p:sldId id="1126" r:id="rId32"/>
-    <p:sldId id="1127" r:id="rId33"/>
-    <p:sldId id="1125" r:id="rId34"/>
-    <p:sldId id="1104" r:id="rId35"/>
-    <p:sldId id="1118" r:id="rId36"/>
-    <p:sldId id="1119" r:id="rId37"/>
-    <p:sldId id="1120" r:id="rId38"/>
-    <p:sldId id="1121" r:id="rId39"/>
-    <p:sldId id="1129" r:id="rId40"/>
-    <p:sldId id="1122" r:id="rId41"/>
-    <p:sldId id="957" r:id="rId42"/>
-    <p:sldId id="958" r:id="rId43"/>
-    <p:sldId id="1131" r:id="rId44"/>
-    <p:sldId id="874" r:id="rId45"/>
-    <p:sldId id="291" r:id="rId46"/>
+    <p:sldId id="513" r:id="rId5"/>
+    <p:sldId id="730" r:id="rId6"/>
+    <p:sldId id="1070" r:id="rId7"/>
+    <p:sldId id="1071" r:id="rId8"/>
+    <p:sldId id="1053" r:id="rId9"/>
+    <p:sldId id="763" r:id="rId10"/>
+    <p:sldId id="1052" r:id="rId11"/>
+    <p:sldId id="1069" r:id="rId12"/>
+    <p:sldId id="876" r:id="rId13"/>
+    <p:sldId id="860" r:id="rId14"/>
+    <p:sldId id="759" r:id="rId15"/>
+    <p:sldId id="1054" r:id="rId16"/>
+    <p:sldId id="1107" r:id="rId17"/>
+    <p:sldId id="1108" r:id="rId18"/>
+    <p:sldId id="1128" r:id="rId19"/>
+    <p:sldId id="1109" r:id="rId20"/>
+    <p:sldId id="1123" r:id="rId21"/>
+    <p:sldId id="1056" r:id="rId22"/>
+    <p:sldId id="1097" r:id="rId23"/>
+    <p:sldId id="1110" r:id="rId24"/>
+    <p:sldId id="1111" r:id="rId25"/>
+    <p:sldId id="1112" r:id="rId26"/>
+    <p:sldId id="1113" r:id="rId27"/>
+    <p:sldId id="1114" r:id="rId28"/>
+    <p:sldId id="1124" r:id="rId29"/>
+    <p:sldId id="1103" r:id="rId30"/>
+    <p:sldId id="1115" r:id="rId31"/>
+    <p:sldId id="1116" r:id="rId32"/>
+    <p:sldId id="1130" r:id="rId33"/>
+    <p:sldId id="1117" r:id="rId34"/>
+    <p:sldId id="1126" r:id="rId35"/>
+    <p:sldId id="1127" r:id="rId36"/>
+    <p:sldId id="1125" r:id="rId37"/>
+    <p:sldId id="1104" r:id="rId38"/>
+    <p:sldId id="1118" r:id="rId39"/>
+    <p:sldId id="1119" r:id="rId40"/>
+    <p:sldId id="1120" r:id="rId41"/>
+    <p:sldId id="1121" r:id="rId42"/>
+    <p:sldId id="1129" r:id="rId43"/>
+    <p:sldId id="1122" r:id="rId44"/>
+    <p:sldId id="957" r:id="rId45"/>
+    <p:sldId id="958" r:id="rId46"/>
+    <p:sldId id="1131" r:id="rId47"/>
+    <p:sldId id="874" r:id="rId48"/>
+    <p:sldId id="291" r:id="rId49"/>
   </p:sldIdLst>
   <p:sldSz cx="9144000" cy="5143500" type="screen16x9"/>
   <p:notesSz cx="6858000" cy="9144000"/>
   <p:custDataLst>
-    <p:tags r:id="rId48"/>
+    <p:tags r:id="rId51"/>
   </p:custDataLst>
   <p:defaultTextStyle>
     <a:defPPr>
@@ -234,7 +234,28 @@
       </p:ext>
     </p:extLst>
   </p:cmAuthor>
+  <p:cmAuthor id="5" name="p.olivero.3584" initials="p" lastIdx="1" clrIdx="5">
+    <p:extLst>
+      <p:ext uri="{19B8F6BF-5375-455C-9EA6-DF929625EA0E}">
+        <p15:presenceInfo xmlns:p15="http://schemas.microsoft.com/office/powerpoint/2012/main" userId="S-1-5-21-299502267-725345543-1801674531-77409" providerId="AD"/>
+      </p:ext>
+    </p:extLst>
+  </p:cmAuthor>
 </p:cmAuthorLst>
+</file>
+
+<file path=ppt/comments/comment1.xml><?xml version="1.0" encoding="utf-8"?>
+<p:cmLst xmlns:a="http://schemas.openxmlformats.org/drawingml/2006/main" xmlns:r="http://schemas.openxmlformats.org/officeDocument/2006/relationships" xmlns:p="http://schemas.openxmlformats.org/presentationml/2006/main">
+  <p:cm authorId="5" dt="2026-03-11T09:24:38.537" idx="1">
+    <p:pos x="5592" y="26"/>
+    <p:text>46 al posto di 45</p:text>
+    <p:extLst>
+      <p:ext uri="{C676402C-5697-4E1C-873F-D02D1690AC5C}">
+        <p15:threadingInfo xmlns:p15="http://schemas.microsoft.com/office/powerpoint/2012/main" timeZoneBias="-60"/>
+      </p:ext>
+    </p:extLst>
+  </p:cm>
+</p:cmLst>
 </file>
 
 <file path=ppt/notesMasters/notesMaster1.xml><?xml version="1.0" encoding="utf-8"?>
@@ -319,7 +340,7 @@
           <a:p>
             <a:fld id="{136337D9-3022-3D41-8D8A-BDF2F3B0DD8E}" type="datetimeFigureOut">
               <a:rPr lang="en-US" smtClean="0"/>
-              <a:t>8/17/2023</a:t>
+              <a:t>3/11/2026</a:t>
             </a:fld>
             <a:endParaRPr lang="en-US" dirty="0"/>
           </a:p>
@@ -477,7 +498,7 @@
           <a:p>
             <a:fld id="{5641018C-6CAF-B84E-B92C-ECB119457FBA}" type="slidenum">
               <a:rPr lang="en-US" smtClean="0"/>
-              <a:t>‹#›</a:t>
+              <a:t>‹N›</a:t>
             </a:fld>
             <a:endParaRPr lang="en-US" dirty="0"/>
           </a:p>
@@ -14679,7 +14700,7 @@
               <a:pPr defTabSz="385763">
                 <a:defRPr/>
               </a:pPr>
-              <a:t>‹#›</a:t>
+              <a:t>‹N›</a:t>
             </a:fld>
             <a:endParaRPr lang="en-US" kern="0" dirty="0">
               <a:solidFill>
@@ -19898,7 +19919,7 @@
                 </a:spcAft>
                 <a:defRPr/>
               </a:pPr>
-              <a:t>‹#›</a:t>
+              <a:t>‹N›</a:t>
             </a:fld>
             <a:endParaRPr lang="en-US" sz="600" dirty="0">
               <a:solidFill>
@@ -26429,7 +26450,7 @@
                 </a:spcAft>
                 <a:defRPr/>
               </a:pPr>
-              <a:t>‹#›</a:t>
+              <a:t>‹N›</a:t>
             </a:fld>
             <a:endParaRPr lang="en-US" sz="600" dirty="0">
               <a:solidFill>
@@ -29029,7 +29050,7 @@
           <p:cNvPr id="2" name="Content Placeholder 1">
             <a:extLst>
               <a:ext uri="{FF2B5EF4-FFF2-40B4-BE49-F238E27FC236}">
-                <a16:creationId xmlns:a16="http://schemas.microsoft.com/office/drawing/2014/main" id="{578E99C3-C6EF-8348-99C6-8024418DDEF2}"/>
+                <a16:creationId xmlns:a16="http://schemas.microsoft.com/office/drawing/2014/main" xmlns="" id="{578E99C3-C6EF-8348-99C6-8024418DDEF2}"/>
               </a:ext>
             </a:extLst>
           </p:cNvPr>
@@ -29159,7 +29180,7 @@
           <p:cNvPr id="3" name="Table 2">
             <a:extLst>
               <a:ext uri="{FF2B5EF4-FFF2-40B4-BE49-F238E27FC236}">
-                <a16:creationId xmlns:a16="http://schemas.microsoft.com/office/drawing/2014/main" id="{2203BE17-8BB3-DF41-A2CF-06DE014D1956}"/>
+                <a16:creationId xmlns:a16="http://schemas.microsoft.com/office/drawing/2014/main" xmlns="" id="{2203BE17-8BB3-DF41-A2CF-06DE014D1956}"/>
               </a:ext>
             </a:extLst>
           </p:cNvPr>
@@ -29188,14 +29209,14 @@
                 <a:gridCol w="3583809">
                   <a:extLst>
                     <a:ext uri="{9D8B030D-6E8A-4147-A177-3AD203B41FA5}">
-                      <a16:colId xmlns:a16="http://schemas.microsoft.com/office/drawing/2014/main" val="2579019526"/>
+                      <a16:colId xmlns:a16="http://schemas.microsoft.com/office/drawing/2014/main" xmlns="" val="2579019526"/>
                     </a:ext>
                   </a:extLst>
                 </a:gridCol>
                 <a:gridCol w="4780544">
                   <a:extLst>
                     <a:ext uri="{9D8B030D-6E8A-4147-A177-3AD203B41FA5}">
-                      <a16:colId xmlns:a16="http://schemas.microsoft.com/office/drawing/2014/main" val="1764220437"/>
+                      <a16:colId xmlns:a16="http://schemas.microsoft.com/office/drawing/2014/main" xmlns="" val="1764220437"/>
                     </a:ext>
                   </a:extLst>
                 </a:gridCol>
@@ -29241,7 +29262,7 @@
                 </a:tc>
                 <a:extLst>
                   <a:ext uri="{0D108BD9-81ED-4DB2-BD59-A6C34878D82A}">
-                    <a16:rowId xmlns:a16="http://schemas.microsoft.com/office/drawing/2014/main" val="742401779"/>
+                    <a16:rowId xmlns:a16="http://schemas.microsoft.com/office/drawing/2014/main" xmlns="" val="742401779"/>
                   </a:ext>
                 </a:extLst>
               </a:tr>
@@ -29293,7 +29314,7 @@
                 </a:tc>
                 <a:extLst>
                   <a:ext uri="{0D108BD9-81ED-4DB2-BD59-A6C34878D82A}">
-                    <a16:rowId xmlns:a16="http://schemas.microsoft.com/office/drawing/2014/main" val="3228802595"/>
+                    <a16:rowId xmlns:a16="http://schemas.microsoft.com/office/drawing/2014/main" xmlns="" val="3228802595"/>
                   </a:ext>
                 </a:extLst>
               </a:tr>
@@ -29345,7 +29366,7 @@
                 </a:tc>
                 <a:extLst>
                   <a:ext uri="{0D108BD9-81ED-4DB2-BD59-A6C34878D82A}">
-                    <a16:rowId xmlns:a16="http://schemas.microsoft.com/office/drawing/2014/main" val="3134809945"/>
+                    <a16:rowId xmlns:a16="http://schemas.microsoft.com/office/drawing/2014/main" xmlns="" val="3134809945"/>
                   </a:ext>
                 </a:extLst>
               </a:tr>
@@ -29397,7 +29418,7 @@
                 </a:tc>
                 <a:extLst>
                   <a:ext uri="{0D108BD9-81ED-4DB2-BD59-A6C34878D82A}">
-                    <a16:rowId xmlns:a16="http://schemas.microsoft.com/office/drawing/2014/main" val="1935925893"/>
+                    <a16:rowId xmlns:a16="http://schemas.microsoft.com/office/drawing/2014/main" xmlns="" val="1935925893"/>
                   </a:ext>
                 </a:extLst>
               </a:tr>
@@ -29449,7 +29470,7 @@
                 </a:tc>
                 <a:extLst>
                   <a:ext uri="{0D108BD9-81ED-4DB2-BD59-A6C34878D82A}">
-                    <a16:rowId xmlns:a16="http://schemas.microsoft.com/office/drawing/2014/main" val="207557669"/>
+                    <a16:rowId xmlns:a16="http://schemas.microsoft.com/office/drawing/2014/main" xmlns="" val="207557669"/>
                   </a:ext>
                 </a:extLst>
               </a:tr>
@@ -29568,7 +29589,7 @@
           <p:cNvPr id="3" name="Title 2">
             <a:extLst>
               <a:ext uri="{FF2B5EF4-FFF2-40B4-BE49-F238E27FC236}">
-                <a16:creationId xmlns:a16="http://schemas.microsoft.com/office/drawing/2014/main" id="{C02AA8F8-1E43-384B-8982-C0BB94049B5C}"/>
+                <a16:creationId xmlns:a16="http://schemas.microsoft.com/office/drawing/2014/main" xmlns="" id="{C02AA8F8-1E43-384B-8982-C0BB94049B5C}"/>
               </a:ext>
             </a:extLst>
           </p:cNvPr>
@@ -29593,6 +29614,10 @@
               <a:rPr lang="en-US" sz="1600" dirty="0"/>
               <a:t>Ethernet Frames</a:t>
             </a:r>
+            <a:r>
+              <a:rPr lang="en-US" dirty="0"/>
+              <a:t/>
+            </a:r>
             <a:br>
               <a:rPr lang="en-US" dirty="0"/>
             </a:br>
@@ -29608,7 +29633,7 @@
           <p:cNvPr id="8" name="Content Placeholder 7">
             <a:extLst>
               <a:ext uri="{FF2B5EF4-FFF2-40B4-BE49-F238E27FC236}">
-                <a16:creationId xmlns:a16="http://schemas.microsoft.com/office/drawing/2014/main" id="{0739FE46-949D-5848-A3FF-68AA0B91430B}"/>
+                <a16:creationId xmlns:a16="http://schemas.microsoft.com/office/drawing/2014/main" xmlns="" id="{0739FE46-949D-5848-A3FF-68AA0B91430B}"/>
               </a:ext>
             </a:extLst>
           </p:cNvPr>
@@ -29663,7 +29688,7 @@
           <p:cNvPr id="4" name="Picture 3">
             <a:extLst>
               <a:ext uri="{FF2B5EF4-FFF2-40B4-BE49-F238E27FC236}">
-                <a16:creationId xmlns:a16="http://schemas.microsoft.com/office/drawing/2014/main" id="{0D9ED349-78FE-6946-8E1B-0C6059771B2C}"/>
+                <a16:creationId xmlns:a16="http://schemas.microsoft.com/office/drawing/2014/main" xmlns="" id="{0D9ED349-78FE-6946-8E1B-0C6059771B2C}"/>
               </a:ext>
             </a:extLst>
           </p:cNvPr>
@@ -29735,7 +29760,7 @@
           <p:cNvPr id="3" name="Title 2">
             <a:extLst>
               <a:ext uri="{FF2B5EF4-FFF2-40B4-BE49-F238E27FC236}">
-                <a16:creationId xmlns:a16="http://schemas.microsoft.com/office/drawing/2014/main" id="{C02AA8F8-1E43-384B-8982-C0BB94049B5C}"/>
+                <a16:creationId xmlns:a16="http://schemas.microsoft.com/office/drawing/2014/main" xmlns="" id="{C02AA8F8-1E43-384B-8982-C0BB94049B5C}"/>
               </a:ext>
             </a:extLst>
           </p:cNvPr>
@@ -29760,6 +29785,10 @@
               <a:rPr lang="en-US" sz="1600" dirty="0"/>
               <a:t>Ethernet Frames</a:t>
             </a:r>
+            <a:r>
+              <a:rPr lang="en-US" dirty="0"/>
+              <a:t/>
+            </a:r>
             <a:br>
               <a:rPr lang="en-US" dirty="0"/>
             </a:br>
@@ -29775,7 +29804,7 @@
           <p:cNvPr id="5" name="TextBox 4">
             <a:extLst>
               <a:ext uri="{FF2B5EF4-FFF2-40B4-BE49-F238E27FC236}">
-                <a16:creationId xmlns:a16="http://schemas.microsoft.com/office/drawing/2014/main" id="{7D6FED96-F5B8-9740-B01D-C6CD3F14A641}"/>
+                <a16:creationId xmlns:a16="http://schemas.microsoft.com/office/drawing/2014/main" xmlns="" id="{7D6FED96-F5B8-9740-B01D-C6CD3F14A641}"/>
               </a:ext>
             </a:extLst>
           </p:cNvPr>
@@ -29858,7 +29887,7 @@
           <p:cNvPr id="4" name="Content Placeholder 3">
             <a:extLst>
               <a:ext uri="{FF2B5EF4-FFF2-40B4-BE49-F238E27FC236}">
-                <a16:creationId xmlns:a16="http://schemas.microsoft.com/office/drawing/2014/main" id="{6676CA92-276E-A349-B5F5-87C0459C4C86}"/>
+                <a16:creationId xmlns:a16="http://schemas.microsoft.com/office/drawing/2014/main" xmlns="" id="{6676CA92-276E-A349-B5F5-87C0459C4C86}"/>
               </a:ext>
             </a:extLst>
           </p:cNvPr>
@@ -29929,7 +29958,7 @@
           <p:cNvPr id="3" name="Title 2">
             <a:extLst>
               <a:ext uri="{FF2B5EF4-FFF2-40B4-BE49-F238E27FC236}">
-                <a16:creationId xmlns:a16="http://schemas.microsoft.com/office/drawing/2014/main" id="{C02AA8F8-1E43-384B-8982-C0BB94049B5C}"/>
+                <a16:creationId xmlns:a16="http://schemas.microsoft.com/office/drawing/2014/main" xmlns="" id="{C02AA8F8-1E43-384B-8982-C0BB94049B5C}"/>
               </a:ext>
             </a:extLst>
           </p:cNvPr>
@@ -29954,6 +29983,10 @@
               <a:rPr lang="en-US" sz="1600" dirty="0"/>
               <a:t>Ethernet Frames</a:t>
             </a:r>
+            <a:r>
+              <a:rPr lang="en-US" dirty="0"/>
+              <a:t/>
+            </a:r>
             <a:br>
               <a:rPr lang="en-US" dirty="0"/>
             </a:br>
@@ -29969,7 +30002,7 @@
           <p:cNvPr id="8" name="Content Placeholder 7">
             <a:extLst>
               <a:ext uri="{FF2B5EF4-FFF2-40B4-BE49-F238E27FC236}">
-                <a16:creationId xmlns:a16="http://schemas.microsoft.com/office/drawing/2014/main" id="{0739FE46-949D-5848-A3FF-68AA0B91430B}"/>
+                <a16:creationId xmlns:a16="http://schemas.microsoft.com/office/drawing/2014/main" xmlns="" id="{0739FE46-949D-5848-A3FF-68AA0B91430B}"/>
               </a:ext>
             </a:extLst>
           </p:cNvPr>
@@ -30153,7 +30186,7 @@
           <p:cNvPr id="3" name="Title 2">
             <a:extLst>
               <a:ext uri="{FF2B5EF4-FFF2-40B4-BE49-F238E27FC236}">
-                <a16:creationId xmlns:a16="http://schemas.microsoft.com/office/drawing/2014/main" id="{C02AA8F8-1E43-384B-8982-C0BB94049B5C}"/>
+                <a16:creationId xmlns:a16="http://schemas.microsoft.com/office/drawing/2014/main" xmlns="" id="{C02AA8F8-1E43-384B-8982-C0BB94049B5C}"/>
               </a:ext>
             </a:extLst>
           </p:cNvPr>
@@ -30178,6 +30211,10 @@
               <a:rPr lang="en-US" sz="1600" dirty="0"/>
               <a:t>Ethernet Frames</a:t>
             </a:r>
+            <a:r>
+              <a:rPr lang="en-US" dirty="0"/>
+              <a:t/>
+            </a:r>
             <a:br>
               <a:rPr lang="en-US" dirty="0"/>
             </a:br>
@@ -30193,7 +30230,7 @@
           <p:cNvPr id="8" name="Content Placeholder 7">
             <a:extLst>
               <a:ext uri="{FF2B5EF4-FFF2-40B4-BE49-F238E27FC236}">
-                <a16:creationId xmlns:a16="http://schemas.microsoft.com/office/drawing/2014/main" id="{0739FE46-949D-5848-A3FF-68AA0B91430B}"/>
+                <a16:creationId xmlns:a16="http://schemas.microsoft.com/office/drawing/2014/main" xmlns="" id="{0739FE46-949D-5848-A3FF-68AA0B91430B}"/>
               </a:ext>
             </a:extLst>
           </p:cNvPr>
@@ -30273,7 +30310,7 @@
           <p:cNvPr id="4" name="Picture 3">
             <a:extLst>
               <a:ext uri="{FF2B5EF4-FFF2-40B4-BE49-F238E27FC236}">
-                <a16:creationId xmlns:a16="http://schemas.microsoft.com/office/drawing/2014/main" id="{6A9979E0-78FF-C747-A412-797510E5D7C2}"/>
+                <a16:creationId xmlns:a16="http://schemas.microsoft.com/office/drawing/2014/main" xmlns="" id="{6A9979E0-78FF-C747-A412-797510E5D7C2}"/>
               </a:ext>
             </a:extLst>
           </p:cNvPr>
@@ -30345,7 +30382,7 @@
           <p:cNvPr id="3" name="Title 2">
             <a:extLst>
               <a:ext uri="{FF2B5EF4-FFF2-40B4-BE49-F238E27FC236}">
-                <a16:creationId xmlns:a16="http://schemas.microsoft.com/office/drawing/2014/main" id="{C02AA8F8-1E43-384B-8982-C0BB94049B5C}"/>
+                <a16:creationId xmlns:a16="http://schemas.microsoft.com/office/drawing/2014/main" xmlns="" id="{C02AA8F8-1E43-384B-8982-C0BB94049B5C}"/>
               </a:ext>
             </a:extLst>
           </p:cNvPr>
@@ -30370,6 +30407,10 @@
               <a:rPr lang="en-US" sz="1600" dirty="0"/>
               <a:t>Ethernet Frames</a:t>
             </a:r>
+            <a:r>
+              <a:rPr lang="en-US" dirty="0"/>
+              <a:t/>
+            </a:r>
             <a:br>
               <a:rPr lang="en-US" dirty="0"/>
             </a:br>
@@ -30385,7 +30426,7 @@
           <p:cNvPr id="8" name="Content Placeholder 7">
             <a:extLst>
               <a:ext uri="{FF2B5EF4-FFF2-40B4-BE49-F238E27FC236}">
-                <a16:creationId xmlns:a16="http://schemas.microsoft.com/office/drawing/2014/main" id="{0739FE46-949D-5848-A3FF-68AA0B91430B}"/>
+                <a16:creationId xmlns:a16="http://schemas.microsoft.com/office/drawing/2014/main" xmlns="" id="{0739FE46-949D-5848-A3FF-68AA0B91430B}"/>
               </a:ext>
             </a:extLst>
           </p:cNvPr>
@@ -30411,7 +30452,7 @@
               <a:buChar char="•"/>
             </a:pPr>
             <a:r>
-              <a:rPr lang="en-US" sz="1600" dirty="0">
+              <a:rPr lang="en-US" sz="1600" dirty="0" smtClean="0">
                 <a:solidFill>
                   <a:srgbClr val="000000"/>
                 </a:solidFill>
@@ -30425,7 +30466,7 @@
               <a:buChar char="•"/>
             </a:pPr>
             <a:r>
-              <a:rPr lang="en-US" sz="1600" dirty="0">
+              <a:rPr lang="en-US" sz="1600" dirty="0" smtClean="0">
                 <a:solidFill>
                   <a:srgbClr val="000000"/>
                 </a:solidFill>
@@ -30439,7 +30480,7 @@
               <a:buChar char="•"/>
             </a:pPr>
             <a:r>
-              <a:rPr lang="en-US" sz="1600" dirty="0">
+              <a:rPr lang="en-US" sz="1600" dirty="0" smtClean="0">
                 <a:solidFill>
                   <a:srgbClr val="000000"/>
                 </a:solidFill>
@@ -30465,7 +30506,7 @@
           <p:cNvPr id="4" name="Picture 3">
             <a:extLst>
               <a:ext uri="{FF2B5EF4-FFF2-40B4-BE49-F238E27FC236}">
-                <a16:creationId xmlns:a16="http://schemas.microsoft.com/office/drawing/2014/main" id="{48E17D93-6D91-9A41-B7B0-366DE18C84BA}"/>
+                <a16:creationId xmlns:a16="http://schemas.microsoft.com/office/drawing/2014/main" xmlns="" id="{48E17D93-6D91-9A41-B7B0-366DE18C84BA}"/>
               </a:ext>
             </a:extLst>
           </p:cNvPr>
@@ -30537,7 +30578,7 @@
           <p:cNvPr id="3" name="Title 2">
             <a:extLst>
               <a:ext uri="{FF2B5EF4-FFF2-40B4-BE49-F238E27FC236}">
-                <a16:creationId xmlns:a16="http://schemas.microsoft.com/office/drawing/2014/main" id="{C02AA8F8-1E43-384B-8982-C0BB94049B5C}"/>
+                <a16:creationId xmlns:a16="http://schemas.microsoft.com/office/drawing/2014/main" xmlns="" id="{C02AA8F8-1E43-384B-8982-C0BB94049B5C}"/>
               </a:ext>
             </a:extLst>
           </p:cNvPr>
@@ -30562,6 +30603,10 @@
               <a:rPr lang="en-US" sz="1600" dirty="0"/>
               <a:t>Ethernet Frames</a:t>
             </a:r>
+            <a:r>
+              <a:rPr lang="en-US" dirty="0"/>
+              <a:t/>
+            </a:r>
             <a:br>
               <a:rPr lang="en-US" dirty="0"/>
             </a:br>
@@ -30577,7 +30622,7 @@
           <p:cNvPr id="8" name="Content Placeholder 7">
             <a:extLst>
               <a:ext uri="{FF2B5EF4-FFF2-40B4-BE49-F238E27FC236}">
-                <a16:creationId xmlns:a16="http://schemas.microsoft.com/office/drawing/2014/main" id="{0739FE46-949D-5848-A3FF-68AA0B91430B}"/>
+                <a16:creationId xmlns:a16="http://schemas.microsoft.com/office/drawing/2014/main" xmlns="" id="{0739FE46-949D-5848-A3FF-68AA0B91430B}"/>
               </a:ext>
             </a:extLst>
           </p:cNvPr>
@@ -30763,7 +30808,7 @@
           <p:cNvPr id="3" name="Title 2">
             <a:extLst>
               <a:ext uri="{FF2B5EF4-FFF2-40B4-BE49-F238E27FC236}">
-                <a16:creationId xmlns:a16="http://schemas.microsoft.com/office/drawing/2014/main" id="{C02AA8F8-1E43-384B-8982-C0BB94049B5C}"/>
+                <a16:creationId xmlns:a16="http://schemas.microsoft.com/office/drawing/2014/main" xmlns="" id="{C02AA8F8-1E43-384B-8982-C0BB94049B5C}"/>
               </a:ext>
             </a:extLst>
           </p:cNvPr>
@@ -30788,6 +30833,10 @@
               <a:rPr lang="en-US" sz="1600" dirty="0"/>
               <a:t>Ethernet MAC Addresses</a:t>
             </a:r>
+            <a:r>
+              <a:rPr lang="en-US" dirty="0"/>
+              <a:t/>
+            </a:r>
             <a:br>
               <a:rPr lang="en-US" dirty="0"/>
             </a:br>
@@ -30803,7 +30852,7 @@
           <p:cNvPr id="4" name="Content Placeholder 3">
             <a:extLst>
               <a:ext uri="{FF2B5EF4-FFF2-40B4-BE49-F238E27FC236}">
-                <a16:creationId xmlns:a16="http://schemas.microsoft.com/office/drawing/2014/main" id="{1F3CA7BB-7E7C-7149-9859-4AA0DDEC8CC4}"/>
+                <a16:creationId xmlns:a16="http://schemas.microsoft.com/office/drawing/2014/main" xmlns="" id="{1F3CA7BB-7E7C-7149-9859-4AA0DDEC8CC4}"/>
               </a:ext>
             </a:extLst>
           </p:cNvPr>
@@ -30996,7 +31045,7 @@
           <p:cNvPr id="6" name="Rectangle 34">
             <a:extLst>
               <a:ext uri="{FF2B5EF4-FFF2-40B4-BE49-F238E27FC236}">
-                <a16:creationId xmlns:a16="http://schemas.microsoft.com/office/drawing/2014/main" id="{ED01EBD2-7B35-475F-8F1C-CCFCB8302F93}"/>
+                <a16:creationId xmlns:a16="http://schemas.microsoft.com/office/drawing/2014/main" xmlns="" id="{ED01EBD2-7B35-475F-8F1C-CCFCB8302F93}"/>
               </a:ext>
             </a:extLst>
           </p:cNvPr>
@@ -31168,7 +31217,7 @@
           <p:cNvPr id="3" name="Title 2">
             <a:extLst>
               <a:ext uri="{FF2B5EF4-FFF2-40B4-BE49-F238E27FC236}">
-                <a16:creationId xmlns:a16="http://schemas.microsoft.com/office/drawing/2014/main" id="{C02AA8F8-1E43-384B-8982-C0BB94049B5C}"/>
+                <a16:creationId xmlns:a16="http://schemas.microsoft.com/office/drawing/2014/main" xmlns="" id="{C02AA8F8-1E43-384B-8982-C0BB94049B5C}"/>
               </a:ext>
             </a:extLst>
           </p:cNvPr>
@@ -31193,6 +31242,10 @@
               <a:rPr lang="en-US" sz="1600" dirty="0"/>
               <a:t>Ethernet MAC Addresses</a:t>
             </a:r>
+            <a:r>
+              <a:rPr lang="en-US" dirty="0"/>
+              <a:t/>
+            </a:r>
             <a:br>
               <a:rPr lang="en-US" dirty="0"/>
             </a:br>
@@ -31208,7 +31261,7 @@
           <p:cNvPr id="4" name="Content Placeholder 3">
             <a:extLst>
               <a:ext uri="{FF2B5EF4-FFF2-40B4-BE49-F238E27FC236}">
-                <a16:creationId xmlns:a16="http://schemas.microsoft.com/office/drawing/2014/main" id="{1F3CA7BB-7E7C-7149-9859-4AA0DDEC8CC4}"/>
+                <a16:creationId xmlns:a16="http://schemas.microsoft.com/office/drawing/2014/main" xmlns="" id="{1F3CA7BB-7E7C-7149-9859-4AA0DDEC8CC4}"/>
               </a:ext>
             </a:extLst>
           </p:cNvPr>
@@ -31302,7 +31355,7 @@
           <p:cNvPr id="5" name="Picture 4">
             <a:extLst>
               <a:ext uri="{FF2B5EF4-FFF2-40B4-BE49-F238E27FC236}">
-                <a16:creationId xmlns:a16="http://schemas.microsoft.com/office/drawing/2014/main" id="{E3B936E3-E1CB-5C42-9445-442FA726A951}"/>
+                <a16:creationId xmlns:a16="http://schemas.microsoft.com/office/drawing/2014/main" xmlns="" id="{E3B936E3-E1CB-5C42-9445-442FA726A951}"/>
               </a:ext>
             </a:extLst>
           </p:cNvPr>
@@ -31374,7 +31427,7 @@
           <p:cNvPr id="3" name="Title 2">
             <a:extLst>
               <a:ext uri="{FF2B5EF4-FFF2-40B4-BE49-F238E27FC236}">
-                <a16:creationId xmlns:a16="http://schemas.microsoft.com/office/drawing/2014/main" id="{C02AA8F8-1E43-384B-8982-C0BB94049B5C}"/>
+                <a16:creationId xmlns:a16="http://schemas.microsoft.com/office/drawing/2014/main" xmlns="" id="{C02AA8F8-1E43-384B-8982-C0BB94049B5C}"/>
               </a:ext>
             </a:extLst>
           </p:cNvPr>
@@ -31399,6 +31452,10 @@
               <a:rPr lang="en-US" sz="1600" dirty="0"/>
               <a:t>Ethernet MAC Addresses</a:t>
             </a:r>
+            <a:r>
+              <a:rPr lang="en-US" dirty="0"/>
+              <a:t/>
+            </a:r>
             <a:br>
               <a:rPr lang="en-US" dirty="0"/>
             </a:br>
@@ -31414,7 +31471,7 @@
           <p:cNvPr id="4" name="Content Placeholder 3">
             <a:extLst>
               <a:ext uri="{FF2B5EF4-FFF2-40B4-BE49-F238E27FC236}">
-                <a16:creationId xmlns:a16="http://schemas.microsoft.com/office/drawing/2014/main" id="{1F3CA7BB-7E7C-7149-9859-4AA0DDEC8CC4}"/>
+                <a16:creationId xmlns:a16="http://schemas.microsoft.com/office/drawing/2014/main" xmlns="" id="{1F3CA7BB-7E7C-7149-9859-4AA0DDEC8CC4}"/>
               </a:ext>
             </a:extLst>
           </p:cNvPr>
@@ -31515,7 +31572,7 @@
           <p:cNvPr id="5" name="Picture 4">
             <a:extLst>
               <a:ext uri="{FF2B5EF4-FFF2-40B4-BE49-F238E27FC236}">
-                <a16:creationId xmlns:a16="http://schemas.microsoft.com/office/drawing/2014/main" id="{96B69223-7D35-3345-89F2-D23C56D422F0}"/>
+                <a16:creationId xmlns:a16="http://schemas.microsoft.com/office/drawing/2014/main" xmlns="" id="{96B69223-7D35-3345-89F2-D23C56D422F0}"/>
               </a:ext>
             </a:extLst>
           </p:cNvPr>
@@ -31587,7 +31644,7 @@
           <p:cNvPr id="3" name="Title 2">
             <a:extLst>
               <a:ext uri="{FF2B5EF4-FFF2-40B4-BE49-F238E27FC236}">
-                <a16:creationId xmlns:a16="http://schemas.microsoft.com/office/drawing/2014/main" id="{C02AA8F8-1E43-384B-8982-C0BB94049B5C}"/>
+                <a16:creationId xmlns:a16="http://schemas.microsoft.com/office/drawing/2014/main" xmlns="" id="{C02AA8F8-1E43-384B-8982-C0BB94049B5C}"/>
               </a:ext>
             </a:extLst>
           </p:cNvPr>
@@ -31612,6 +31669,10 @@
               <a:rPr lang="en-US" sz="1600" dirty="0"/>
               <a:t>Ethernet MAC Addresses</a:t>
             </a:r>
+            <a:r>
+              <a:rPr lang="en-US" dirty="0"/>
+              <a:t/>
+            </a:r>
             <a:br>
               <a:rPr lang="en-US" dirty="0"/>
             </a:br>
@@ -31627,7 +31688,7 @@
           <p:cNvPr id="4" name="Content Placeholder 3">
             <a:extLst>
               <a:ext uri="{FF2B5EF4-FFF2-40B4-BE49-F238E27FC236}">
-                <a16:creationId xmlns:a16="http://schemas.microsoft.com/office/drawing/2014/main" id="{1F3CA7BB-7E7C-7149-9859-4AA0DDEC8CC4}"/>
+                <a16:creationId xmlns:a16="http://schemas.microsoft.com/office/drawing/2014/main" xmlns="" id="{1F3CA7BB-7E7C-7149-9859-4AA0DDEC8CC4}"/>
               </a:ext>
             </a:extLst>
           </p:cNvPr>
@@ -31725,7 +31786,7 @@
           <p:cNvPr id="5" name="Picture 4">
             <a:extLst>
               <a:ext uri="{FF2B5EF4-FFF2-40B4-BE49-F238E27FC236}">
-                <a16:creationId xmlns:a16="http://schemas.microsoft.com/office/drawing/2014/main" id="{5AC423A4-E5CC-3D4C-8FD2-2A3C0F10D304}"/>
+                <a16:creationId xmlns:a16="http://schemas.microsoft.com/office/drawing/2014/main" xmlns="" id="{5AC423A4-E5CC-3D4C-8FD2-2A3C0F10D304}"/>
               </a:ext>
             </a:extLst>
           </p:cNvPr>
@@ -31797,7 +31858,7 @@
           <p:cNvPr id="3" name="Title 2">
             <a:extLst>
               <a:ext uri="{FF2B5EF4-FFF2-40B4-BE49-F238E27FC236}">
-                <a16:creationId xmlns:a16="http://schemas.microsoft.com/office/drawing/2014/main" id="{C02AA8F8-1E43-384B-8982-C0BB94049B5C}"/>
+                <a16:creationId xmlns:a16="http://schemas.microsoft.com/office/drawing/2014/main" xmlns="" id="{C02AA8F8-1E43-384B-8982-C0BB94049B5C}"/>
               </a:ext>
             </a:extLst>
           </p:cNvPr>
@@ -31822,6 +31883,10 @@
               <a:rPr lang="en-US" sz="1600" dirty="0"/>
               <a:t>Ethernet MAC Addresses</a:t>
             </a:r>
+            <a:r>
+              <a:rPr lang="en-US" dirty="0"/>
+              <a:t/>
+            </a:r>
             <a:br>
               <a:rPr lang="en-US" dirty="0"/>
             </a:br>
@@ -31837,7 +31902,7 @@
           <p:cNvPr id="4" name="Content Placeholder 3">
             <a:extLst>
               <a:ext uri="{FF2B5EF4-FFF2-40B4-BE49-F238E27FC236}">
-                <a16:creationId xmlns:a16="http://schemas.microsoft.com/office/drawing/2014/main" id="{1F3CA7BB-7E7C-7149-9859-4AA0DDEC8CC4}"/>
+                <a16:creationId xmlns:a16="http://schemas.microsoft.com/office/drawing/2014/main" xmlns="" id="{1F3CA7BB-7E7C-7149-9859-4AA0DDEC8CC4}"/>
               </a:ext>
             </a:extLst>
           </p:cNvPr>
@@ -31925,7 +31990,7 @@
           <p:cNvPr id="5" name="Picture 4">
             <a:extLst>
               <a:ext uri="{FF2B5EF4-FFF2-40B4-BE49-F238E27FC236}">
-                <a16:creationId xmlns:a16="http://schemas.microsoft.com/office/drawing/2014/main" id="{9BB74621-5EE7-1449-9518-A33F812065C0}"/>
+                <a16:creationId xmlns:a16="http://schemas.microsoft.com/office/drawing/2014/main" xmlns="" id="{9BB74621-5EE7-1449-9518-A33F812065C0}"/>
               </a:ext>
             </a:extLst>
           </p:cNvPr>
@@ -31997,7 +32062,7 @@
           <p:cNvPr id="3" name="Title 2">
             <a:extLst>
               <a:ext uri="{FF2B5EF4-FFF2-40B4-BE49-F238E27FC236}">
-                <a16:creationId xmlns:a16="http://schemas.microsoft.com/office/drawing/2014/main" id="{C02AA8F8-1E43-384B-8982-C0BB94049B5C}"/>
+                <a16:creationId xmlns:a16="http://schemas.microsoft.com/office/drawing/2014/main" xmlns="" id="{C02AA8F8-1E43-384B-8982-C0BB94049B5C}"/>
               </a:ext>
             </a:extLst>
           </p:cNvPr>
@@ -32022,6 +32087,10 @@
               <a:rPr lang="en-US" sz="1600" dirty="0"/>
               <a:t>Ethernet MAC Addresses</a:t>
             </a:r>
+            <a:r>
+              <a:rPr lang="en-US" dirty="0"/>
+              <a:t/>
+            </a:r>
             <a:br>
               <a:rPr lang="en-US" dirty="0"/>
             </a:br>
@@ -32037,7 +32106,7 @@
           <p:cNvPr id="4" name="Content Placeholder 3">
             <a:extLst>
               <a:ext uri="{FF2B5EF4-FFF2-40B4-BE49-F238E27FC236}">
-                <a16:creationId xmlns:a16="http://schemas.microsoft.com/office/drawing/2014/main" id="{1F3CA7BB-7E7C-7149-9859-4AA0DDEC8CC4}"/>
+                <a16:creationId xmlns:a16="http://schemas.microsoft.com/office/drawing/2014/main" xmlns="" id="{1F3CA7BB-7E7C-7149-9859-4AA0DDEC8CC4}"/>
               </a:ext>
             </a:extLst>
           </p:cNvPr>
@@ -32145,7 +32214,7 @@
           <p:cNvPr id="5" name="Picture 4">
             <a:extLst>
               <a:ext uri="{FF2B5EF4-FFF2-40B4-BE49-F238E27FC236}">
-                <a16:creationId xmlns:a16="http://schemas.microsoft.com/office/drawing/2014/main" id="{C2CEE847-F74D-1643-8791-340AD51F8CE0}"/>
+                <a16:creationId xmlns:a16="http://schemas.microsoft.com/office/drawing/2014/main" xmlns="" id="{C2CEE847-F74D-1643-8791-340AD51F8CE0}"/>
               </a:ext>
             </a:extLst>
           </p:cNvPr>
@@ -32217,7 +32286,7 @@
           <p:cNvPr id="3" name="Title 2">
             <a:extLst>
               <a:ext uri="{FF2B5EF4-FFF2-40B4-BE49-F238E27FC236}">
-                <a16:creationId xmlns:a16="http://schemas.microsoft.com/office/drawing/2014/main" id="{C02AA8F8-1E43-384B-8982-C0BB94049B5C}"/>
+                <a16:creationId xmlns:a16="http://schemas.microsoft.com/office/drawing/2014/main" xmlns="" id="{C02AA8F8-1E43-384B-8982-C0BB94049B5C}"/>
               </a:ext>
             </a:extLst>
           </p:cNvPr>
@@ -32242,6 +32311,10 @@
               <a:rPr lang="en-US" sz="1600" dirty="0"/>
               <a:t>Ethernet MAC Addresses</a:t>
             </a:r>
+            <a:r>
+              <a:rPr lang="en-US" dirty="0"/>
+              <a:t/>
+            </a:r>
             <a:br>
               <a:rPr lang="en-US" dirty="0"/>
             </a:br>
@@ -32257,7 +32330,7 @@
           <p:cNvPr id="4" name="Content Placeholder 3">
             <a:extLst>
               <a:ext uri="{FF2B5EF4-FFF2-40B4-BE49-F238E27FC236}">
-                <a16:creationId xmlns:a16="http://schemas.microsoft.com/office/drawing/2014/main" id="{1F3CA7BB-7E7C-7149-9859-4AA0DDEC8CC4}"/>
+                <a16:creationId xmlns:a16="http://schemas.microsoft.com/office/drawing/2014/main" xmlns="" id="{1F3CA7BB-7E7C-7149-9859-4AA0DDEC8CC4}"/>
               </a:ext>
             </a:extLst>
           </p:cNvPr>
@@ -32457,7 +32530,7 @@
           <p:cNvPr id="3" name="Title 2">
             <a:extLst>
               <a:ext uri="{FF2B5EF4-FFF2-40B4-BE49-F238E27FC236}">
-                <a16:creationId xmlns:a16="http://schemas.microsoft.com/office/drawing/2014/main" id="{C02AA8F8-1E43-384B-8982-C0BB94049B5C}"/>
+                <a16:creationId xmlns:a16="http://schemas.microsoft.com/office/drawing/2014/main" xmlns="" id="{C02AA8F8-1E43-384B-8982-C0BB94049B5C}"/>
               </a:ext>
             </a:extLst>
           </p:cNvPr>
@@ -32482,6 +32555,10 @@
               <a:rPr lang="en-US" sz="1600" dirty="0"/>
               <a:t>The MAC Address Table</a:t>
             </a:r>
+            <a:r>
+              <a:rPr lang="en-US" dirty="0"/>
+              <a:t/>
+            </a:r>
             <a:br>
               <a:rPr lang="en-US" dirty="0"/>
             </a:br>
@@ -32497,7 +32574,7 @@
           <p:cNvPr id="4" name="Content Placeholder 3">
             <a:extLst>
               <a:ext uri="{FF2B5EF4-FFF2-40B4-BE49-F238E27FC236}">
-                <a16:creationId xmlns:a16="http://schemas.microsoft.com/office/drawing/2014/main" id="{1F3CA7BB-7E7C-7149-9859-4AA0DDEC8CC4}"/>
+                <a16:creationId xmlns:a16="http://schemas.microsoft.com/office/drawing/2014/main" xmlns="" id="{1F3CA7BB-7E7C-7149-9859-4AA0DDEC8CC4}"/>
               </a:ext>
             </a:extLst>
           </p:cNvPr>
@@ -32651,7 +32728,7 @@
           <p:cNvPr id="3" name="Title 2">
             <a:extLst>
               <a:ext uri="{FF2B5EF4-FFF2-40B4-BE49-F238E27FC236}">
-                <a16:creationId xmlns:a16="http://schemas.microsoft.com/office/drawing/2014/main" id="{C02AA8F8-1E43-384B-8982-C0BB94049B5C}"/>
+                <a16:creationId xmlns:a16="http://schemas.microsoft.com/office/drawing/2014/main" xmlns="" id="{C02AA8F8-1E43-384B-8982-C0BB94049B5C}"/>
               </a:ext>
             </a:extLst>
           </p:cNvPr>
@@ -32676,6 +32753,10 @@
               <a:rPr lang="en-US" sz="1600" dirty="0"/>
               <a:t>The MAC Address Table</a:t>
             </a:r>
+            <a:r>
+              <a:rPr lang="en-US" dirty="0"/>
+              <a:t/>
+            </a:r>
             <a:br>
               <a:rPr lang="en-US" dirty="0"/>
             </a:br>
@@ -32691,7 +32772,7 @@
           <p:cNvPr id="4" name="Content Placeholder 3">
             <a:extLst>
               <a:ext uri="{FF2B5EF4-FFF2-40B4-BE49-F238E27FC236}">
-                <a16:creationId xmlns:a16="http://schemas.microsoft.com/office/drawing/2014/main" id="{1F3CA7BB-7E7C-7149-9859-4AA0DDEC8CC4}"/>
+                <a16:creationId xmlns:a16="http://schemas.microsoft.com/office/drawing/2014/main" xmlns="" id="{1F3CA7BB-7E7C-7149-9859-4AA0DDEC8CC4}"/>
               </a:ext>
             </a:extLst>
           </p:cNvPr>
@@ -32814,7 +32895,7 @@
           <p:cNvPr id="3" name="Title 2">
             <a:extLst>
               <a:ext uri="{FF2B5EF4-FFF2-40B4-BE49-F238E27FC236}">
-                <a16:creationId xmlns:a16="http://schemas.microsoft.com/office/drawing/2014/main" id="{C02AA8F8-1E43-384B-8982-C0BB94049B5C}"/>
+                <a16:creationId xmlns:a16="http://schemas.microsoft.com/office/drawing/2014/main" xmlns="" id="{C02AA8F8-1E43-384B-8982-C0BB94049B5C}"/>
               </a:ext>
             </a:extLst>
           </p:cNvPr>
@@ -32839,6 +32920,10 @@
               <a:rPr lang="en-US" sz="1600" dirty="0"/>
               <a:t>The MAC Address Table</a:t>
             </a:r>
+            <a:r>
+              <a:rPr lang="en-US" dirty="0"/>
+              <a:t/>
+            </a:r>
             <a:br>
               <a:rPr lang="en-US" dirty="0"/>
             </a:br>
@@ -32854,7 +32939,7 @@
           <p:cNvPr id="4" name="Content Placeholder 3">
             <a:extLst>
               <a:ext uri="{FF2B5EF4-FFF2-40B4-BE49-F238E27FC236}">
-                <a16:creationId xmlns:a16="http://schemas.microsoft.com/office/drawing/2014/main" id="{1F3CA7BB-7E7C-7149-9859-4AA0DDEC8CC4}"/>
+                <a16:creationId xmlns:a16="http://schemas.microsoft.com/office/drawing/2014/main" xmlns="" id="{1F3CA7BB-7E7C-7149-9859-4AA0DDEC8CC4}"/>
               </a:ext>
             </a:extLst>
           </p:cNvPr>
@@ -32977,7 +33062,7 @@
           <p:cNvPr id="2" name="Content Placeholder 1">
             <a:extLst>
               <a:ext uri="{FF2B5EF4-FFF2-40B4-BE49-F238E27FC236}">
-                <a16:creationId xmlns:a16="http://schemas.microsoft.com/office/drawing/2014/main" id="{C2EDE137-350D-6D47-BD51-750CD198389A}"/>
+                <a16:creationId xmlns:a16="http://schemas.microsoft.com/office/drawing/2014/main" xmlns="" id="{C2EDE137-350D-6D47-BD51-750CD198389A}"/>
               </a:ext>
             </a:extLst>
           </p:cNvPr>
@@ -33022,7 +33107,7 @@
           <p:cNvPr id="3" name="Title 2">
             <a:extLst>
               <a:ext uri="{FF2B5EF4-FFF2-40B4-BE49-F238E27FC236}">
-                <a16:creationId xmlns:a16="http://schemas.microsoft.com/office/drawing/2014/main" id="{D0DBD329-AB20-664C-9697-486FE5CED9B9}"/>
+                <a16:creationId xmlns:a16="http://schemas.microsoft.com/office/drawing/2014/main" xmlns="" id="{D0DBD329-AB20-664C-9697-486FE5CED9B9}"/>
               </a:ext>
             </a:extLst>
           </p:cNvPr>
@@ -33055,7 +33140,7 @@
           <p:cNvPr id="4" name="Table 3">
             <a:extLst>
               <a:ext uri="{FF2B5EF4-FFF2-40B4-BE49-F238E27FC236}">
-                <a16:creationId xmlns:a16="http://schemas.microsoft.com/office/drawing/2014/main" id="{24EE699F-A87C-2246-9235-C1DFDF6B2651}"/>
+                <a16:creationId xmlns:a16="http://schemas.microsoft.com/office/drawing/2014/main" xmlns="" id="{24EE699F-A87C-2246-9235-C1DFDF6B2651}"/>
               </a:ext>
             </a:extLst>
           </p:cNvPr>
@@ -33078,14 +33163,14 @@
                 <a:gridCol w="2140558">
                   <a:extLst>
                     <a:ext uri="{9D8B030D-6E8A-4147-A177-3AD203B41FA5}">
-                      <a16:colId xmlns:a16="http://schemas.microsoft.com/office/drawing/2014/main" val="200107645"/>
+                      <a16:colId xmlns:a16="http://schemas.microsoft.com/office/drawing/2014/main" xmlns="" val="200107645"/>
                     </a:ext>
                   </a:extLst>
                 </a:gridCol>
                 <a:gridCol w="6416970">
                   <a:extLst>
                     <a:ext uri="{9D8B030D-6E8A-4147-A177-3AD203B41FA5}">
-                      <a16:colId xmlns:a16="http://schemas.microsoft.com/office/drawing/2014/main" val="2648404099"/>
+                      <a16:colId xmlns:a16="http://schemas.microsoft.com/office/drawing/2014/main" xmlns="" val="2648404099"/>
                     </a:ext>
                   </a:extLst>
                 </a:gridCol>
@@ -33119,7 +33204,7 @@
                 </a:tc>
                 <a:extLst>
                   <a:ext uri="{0D108BD9-81ED-4DB2-BD59-A6C34878D82A}">
-                    <a16:rowId xmlns:a16="http://schemas.microsoft.com/office/drawing/2014/main" val="367710602"/>
+                    <a16:rowId xmlns:a16="http://schemas.microsoft.com/office/drawing/2014/main" xmlns="" val="367710602"/>
                   </a:ext>
                 </a:extLst>
               </a:tr>
@@ -33176,7 +33261,7 @@
                 </a:tc>
                 <a:extLst>
                   <a:ext uri="{0D108BD9-81ED-4DB2-BD59-A6C34878D82A}">
-                    <a16:rowId xmlns:a16="http://schemas.microsoft.com/office/drawing/2014/main" val="698835149"/>
+                    <a16:rowId xmlns:a16="http://schemas.microsoft.com/office/drawing/2014/main" xmlns="" val="698835149"/>
                   </a:ext>
                 </a:extLst>
               </a:tr>
@@ -33249,7 +33334,7 @@
                 </a:tc>
                 <a:extLst>
                   <a:ext uri="{0D108BD9-81ED-4DB2-BD59-A6C34878D82A}">
-                    <a16:rowId xmlns:a16="http://schemas.microsoft.com/office/drawing/2014/main" val="904576505"/>
+                    <a16:rowId xmlns:a16="http://schemas.microsoft.com/office/drawing/2014/main" xmlns="" val="904576505"/>
                   </a:ext>
                 </a:extLst>
               </a:tr>
@@ -33315,7 +33400,7 @@
                 </a:tc>
                 <a:extLst>
                   <a:ext uri="{0D108BD9-81ED-4DB2-BD59-A6C34878D82A}">
-                    <a16:rowId xmlns:a16="http://schemas.microsoft.com/office/drawing/2014/main" val="2876586054"/>
+                    <a16:rowId xmlns:a16="http://schemas.microsoft.com/office/drawing/2014/main" xmlns="" val="2876586054"/>
                   </a:ext>
                 </a:extLst>
               </a:tr>
@@ -33371,7 +33456,7 @@
                 </a:tc>
                 <a:extLst>
                   <a:ext uri="{0D108BD9-81ED-4DB2-BD59-A6C34878D82A}">
-                    <a16:rowId xmlns:a16="http://schemas.microsoft.com/office/drawing/2014/main" val="3454703549"/>
+                    <a16:rowId xmlns:a16="http://schemas.microsoft.com/office/drawing/2014/main" xmlns="" val="3454703549"/>
                   </a:ext>
                 </a:extLst>
               </a:tr>
@@ -33411,7 +33496,7 @@
                 </a:tc>
                 <a:extLst>
                   <a:ext uri="{0D108BD9-81ED-4DB2-BD59-A6C34878D82A}">
-                    <a16:rowId xmlns:a16="http://schemas.microsoft.com/office/drawing/2014/main" val="2195331658"/>
+                    <a16:rowId xmlns:a16="http://schemas.microsoft.com/office/drawing/2014/main" xmlns="" val="2195331658"/>
                   </a:ext>
                 </a:extLst>
               </a:tr>
@@ -33451,7 +33536,7 @@
                 </a:tc>
                 <a:extLst>
                   <a:ext uri="{0D108BD9-81ED-4DB2-BD59-A6C34878D82A}">
-                    <a16:rowId xmlns:a16="http://schemas.microsoft.com/office/drawing/2014/main" val="3727131555"/>
+                    <a16:rowId xmlns:a16="http://schemas.microsoft.com/office/drawing/2014/main" xmlns="" val="3727131555"/>
                   </a:ext>
                 </a:extLst>
               </a:tr>
@@ -33498,7 +33583,7 @@
           <p:cNvPr id="3" name="Title 2">
             <a:extLst>
               <a:ext uri="{FF2B5EF4-FFF2-40B4-BE49-F238E27FC236}">
-                <a16:creationId xmlns:a16="http://schemas.microsoft.com/office/drawing/2014/main" id="{C02AA8F8-1E43-384B-8982-C0BB94049B5C}"/>
+                <a16:creationId xmlns:a16="http://schemas.microsoft.com/office/drawing/2014/main" xmlns="" id="{C02AA8F8-1E43-384B-8982-C0BB94049B5C}"/>
               </a:ext>
             </a:extLst>
           </p:cNvPr>
@@ -33523,6 +33608,10 @@
               <a:rPr lang="en-US" sz="1600" dirty="0"/>
               <a:t>The MAC Address Table</a:t>
             </a:r>
+            <a:r>
+              <a:rPr lang="en-US" dirty="0"/>
+              <a:t/>
+            </a:r>
             <a:br>
               <a:rPr lang="en-US" dirty="0"/>
             </a:br>
@@ -33538,7 +33627,7 @@
           <p:cNvPr id="4" name="Content Placeholder 3">
             <a:extLst>
               <a:ext uri="{FF2B5EF4-FFF2-40B4-BE49-F238E27FC236}">
-                <a16:creationId xmlns:a16="http://schemas.microsoft.com/office/drawing/2014/main" id="{1F3CA7BB-7E7C-7149-9859-4AA0DDEC8CC4}"/>
+                <a16:creationId xmlns:a16="http://schemas.microsoft.com/office/drawing/2014/main" xmlns="" id="{1F3CA7BB-7E7C-7149-9859-4AA0DDEC8CC4}"/>
               </a:ext>
             </a:extLst>
           </p:cNvPr>
@@ -33576,7 +33665,7 @@
           <p:cNvPr id="5" name="Picture 4">
             <a:extLst>
               <a:ext uri="{FF2B5EF4-FFF2-40B4-BE49-F238E27FC236}">
-                <a16:creationId xmlns:a16="http://schemas.microsoft.com/office/drawing/2014/main" id="{449A7AB3-F150-504C-93AA-B753EDE0AF2D}"/>
+                <a16:creationId xmlns:a16="http://schemas.microsoft.com/office/drawing/2014/main" xmlns="" id="{449A7AB3-F150-504C-93AA-B753EDE0AF2D}"/>
               </a:ext>
             </a:extLst>
           </p:cNvPr>
@@ -33648,7 +33737,7 @@
           <p:cNvPr id="3" name="Title 2">
             <a:extLst>
               <a:ext uri="{FF2B5EF4-FFF2-40B4-BE49-F238E27FC236}">
-                <a16:creationId xmlns:a16="http://schemas.microsoft.com/office/drawing/2014/main" id="{C02AA8F8-1E43-384B-8982-C0BB94049B5C}"/>
+                <a16:creationId xmlns:a16="http://schemas.microsoft.com/office/drawing/2014/main" xmlns="" id="{C02AA8F8-1E43-384B-8982-C0BB94049B5C}"/>
               </a:ext>
             </a:extLst>
           </p:cNvPr>
@@ -33673,6 +33762,10 @@
               <a:rPr lang="en-US" sz="1600" dirty="0"/>
               <a:t>The MAC Address Table</a:t>
             </a:r>
+            <a:r>
+              <a:rPr lang="en-US" dirty="0"/>
+              <a:t/>
+            </a:r>
             <a:br>
               <a:rPr lang="en-US" dirty="0"/>
             </a:br>
@@ -33688,7 +33781,7 @@
           <p:cNvPr id="4" name="Content Placeholder 3">
             <a:extLst>
               <a:ext uri="{FF2B5EF4-FFF2-40B4-BE49-F238E27FC236}">
-                <a16:creationId xmlns:a16="http://schemas.microsoft.com/office/drawing/2014/main" id="{1F3CA7BB-7E7C-7149-9859-4AA0DDEC8CC4}"/>
+                <a16:creationId xmlns:a16="http://schemas.microsoft.com/office/drawing/2014/main" xmlns="" id="{1F3CA7BB-7E7C-7149-9859-4AA0DDEC8CC4}"/>
               </a:ext>
             </a:extLst>
           </p:cNvPr>
@@ -33796,7 +33889,7 @@
           <p:cNvPr id="3" name="Title 2">
             <a:extLst>
               <a:ext uri="{FF2B5EF4-FFF2-40B4-BE49-F238E27FC236}">
-                <a16:creationId xmlns:a16="http://schemas.microsoft.com/office/drawing/2014/main" id="{C02AA8F8-1E43-384B-8982-C0BB94049B5C}"/>
+                <a16:creationId xmlns:a16="http://schemas.microsoft.com/office/drawing/2014/main" xmlns="" id="{C02AA8F8-1E43-384B-8982-C0BB94049B5C}"/>
               </a:ext>
             </a:extLst>
           </p:cNvPr>
@@ -33821,6 +33914,10 @@
               <a:rPr lang="en-US" sz="1600" dirty="0"/>
               <a:t>The MAC Address Table</a:t>
             </a:r>
+            <a:r>
+              <a:rPr lang="en-US" dirty="0"/>
+              <a:t/>
+            </a:r>
             <a:br>
               <a:rPr lang="en-US" dirty="0"/>
             </a:br>
@@ -33836,7 +33933,7 @@
           <p:cNvPr id="4" name="Content Placeholder 3">
             <a:extLst>
               <a:ext uri="{FF2B5EF4-FFF2-40B4-BE49-F238E27FC236}">
-                <a16:creationId xmlns:a16="http://schemas.microsoft.com/office/drawing/2014/main" id="{1F3CA7BB-7E7C-7149-9859-4AA0DDEC8CC4}"/>
+                <a16:creationId xmlns:a16="http://schemas.microsoft.com/office/drawing/2014/main" xmlns="" id="{1F3CA7BB-7E7C-7149-9859-4AA0DDEC8CC4}"/>
               </a:ext>
             </a:extLst>
           </p:cNvPr>
@@ -33960,7 +34057,7 @@
           <p:cNvPr id="3" name="Title 2">
             <a:extLst>
               <a:ext uri="{FF2B5EF4-FFF2-40B4-BE49-F238E27FC236}">
-                <a16:creationId xmlns:a16="http://schemas.microsoft.com/office/drawing/2014/main" id="{C02AA8F8-1E43-384B-8982-C0BB94049B5C}"/>
+                <a16:creationId xmlns:a16="http://schemas.microsoft.com/office/drawing/2014/main" xmlns="" id="{C02AA8F8-1E43-384B-8982-C0BB94049B5C}"/>
               </a:ext>
             </a:extLst>
           </p:cNvPr>
@@ -33985,6 +34082,10 @@
               <a:rPr lang="en-US" sz="1600" dirty="0"/>
               <a:t>The MAC Address Table</a:t>
             </a:r>
+            <a:r>
+              <a:rPr lang="en-US" dirty="0"/>
+              <a:t/>
+            </a:r>
             <a:br>
               <a:rPr lang="en-US" dirty="0"/>
             </a:br>
@@ -34000,7 +34101,7 @@
           <p:cNvPr id="4" name="Content Placeholder 3">
             <a:extLst>
               <a:ext uri="{FF2B5EF4-FFF2-40B4-BE49-F238E27FC236}">
-                <a16:creationId xmlns:a16="http://schemas.microsoft.com/office/drawing/2014/main" id="{1F3CA7BB-7E7C-7149-9859-4AA0DDEC8CC4}"/>
+                <a16:creationId xmlns:a16="http://schemas.microsoft.com/office/drawing/2014/main" xmlns="" id="{1F3CA7BB-7E7C-7149-9859-4AA0DDEC8CC4}"/>
               </a:ext>
             </a:extLst>
           </p:cNvPr>
@@ -34186,7 +34287,7 @@
           <p:cNvPr id="3" name="Title 2">
             <a:extLst>
               <a:ext uri="{FF2B5EF4-FFF2-40B4-BE49-F238E27FC236}">
-                <a16:creationId xmlns:a16="http://schemas.microsoft.com/office/drawing/2014/main" id="{C02AA8F8-1E43-384B-8982-C0BB94049B5C}"/>
+                <a16:creationId xmlns:a16="http://schemas.microsoft.com/office/drawing/2014/main" xmlns="" id="{C02AA8F8-1E43-384B-8982-C0BB94049B5C}"/>
               </a:ext>
             </a:extLst>
           </p:cNvPr>
@@ -34211,6 +34312,10 @@
               <a:rPr lang="en-US" sz="1600" dirty="0"/>
               <a:t>Switch Speeds and Forwarding Methods</a:t>
             </a:r>
+            <a:r>
+              <a:rPr lang="en-US" dirty="0"/>
+              <a:t/>
+            </a:r>
             <a:br>
               <a:rPr lang="en-US" dirty="0"/>
             </a:br>
@@ -34226,7 +34331,7 @@
           <p:cNvPr id="4" name="Content Placeholder 3">
             <a:extLst>
               <a:ext uri="{FF2B5EF4-FFF2-40B4-BE49-F238E27FC236}">
-                <a16:creationId xmlns:a16="http://schemas.microsoft.com/office/drawing/2014/main" id="{1F3CA7BB-7E7C-7149-9859-4AA0DDEC8CC4}"/>
+                <a16:creationId xmlns:a16="http://schemas.microsoft.com/office/drawing/2014/main" xmlns="" id="{1F3CA7BB-7E7C-7149-9859-4AA0DDEC8CC4}"/>
               </a:ext>
             </a:extLst>
           </p:cNvPr>
@@ -34397,7 +34502,7 @@
           <p:cNvPr id="3" name="Title 2">
             <a:extLst>
               <a:ext uri="{FF2B5EF4-FFF2-40B4-BE49-F238E27FC236}">
-                <a16:creationId xmlns:a16="http://schemas.microsoft.com/office/drawing/2014/main" id="{C02AA8F8-1E43-384B-8982-C0BB94049B5C}"/>
+                <a16:creationId xmlns:a16="http://schemas.microsoft.com/office/drawing/2014/main" xmlns="" id="{C02AA8F8-1E43-384B-8982-C0BB94049B5C}"/>
               </a:ext>
             </a:extLst>
           </p:cNvPr>
@@ -34422,6 +34527,10 @@
               <a:rPr lang="en-US" sz="1600" dirty="0"/>
               <a:t>Switch Speeds and Forwarding Methods</a:t>
             </a:r>
+            <a:r>
+              <a:rPr lang="en-US" dirty="0"/>
+              <a:t/>
+            </a:r>
             <a:br>
               <a:rPr lang="en-US" dirty="0"/>
             </a:br>
@@ -34437,7 +34546,7 @@
           <p:cNvPr id="4" name="Content Placeholder 3">
             <a:extLst>
               <a:ext uri="{FF2B5EF4-FFF2-40B4-BE49-F238E27FC236}">
-                <a16:creationId xmlns:a16="http://schemas.microsoft.com/office/drawing/2014/main" id="{1F3CA7BB-7E7C-7149-9859-4AA0DDEC8CC4}"/>
+                <a16:creationId xmlns:a16="http://schemas.microsoft.com/office/drawing/2014/main" xmlns="" id="{1F3CA7BB-7E7C-7149-9859-4AA0DDEC8CC4}"/>
               </a:ext>
             </a:extLst>
           </p:cNvPr>
@@ -34572,7 +34681,7 @@
           <p:cNvPr id="3" name="Title 2">
             <a:extLst>
               <a:ext uri="{FF2B5EF4-FFF2-40B4-BE49-F238E27FC236}">
-                <a16:creationId xmlns:a16="http://schemas.microsoft.com/office/drawing/2014/main" id="{C02AA8F8-1E43-384B-8982-C0BB94049B5C}"/>
+                <a16:creationId xmlns:a16="http://schemas.microsoft.com/office/drawing/2014/main" xmlns="" id="{C02AA8F8-1E43-384B-8982-C0BB94049B5C}"/>
               </a:ext>
             </a:extLst>
           </p:cNvPr>
@@ -34597,6 +34706,10 @@
               <a:rPr lang="en-US" sz="1600" dirty="0"/>
               <a:t>Switch Speeds and Forwarding Methods</a:t>
             </a:r>
+            <a:r>
+              <a:rPr lang="en-US" dirty="0"/>
+              <a:t/>
+            </a:r>
             <a:br>
               <a:rPr lang="en-US" dirty="0"/>
             </a:br>
@@ -34612,7 +34725,7 @@
           <p:cNvPr id="4" name="Content Placeholder 3">
             <a:extLst>
               <a:ext uri="{FF2B5EF4-FFF2-40B4-BE49-F238E27FC236}">
-                <a16:creationId xmlns:a16="http://schemas.microsoft.com/office/drawing/2014/main" id="{1F3CA7BB-7E7C-7149-9859-4AA0DDEC8CC4}"/>
+                <a16:creationId xmlns:a16="http://schemas.microsoft.com/office/drawing/2014/main" xmlns="" id="{1F3CA7BB-7E7C-7149-9859-4AA0DDEC8CC4}"/>
               </a:ext>
             </a:extLst>
           </p:cNvPr>
@@ -34785,7 +34898,7 @@
           <p:cNvPr id="2" name="Table 1">
             <a:extLst>
               <a:ext uri="{FF2B5EF4-FFF2-40B4-BE49-F238E27FC236}">
-                <a16:creationId xmlns:a16="http://schemas.microsoft.com/office/drawing/2014/main" id="{0138F2A8-C500-184D-877E-6BADCD4F07C5}"/>
+                <a16:creationId xmlns:a16="http://schemas.microsoft.com/office/drawing/2014/main" xmlns="" id="{0138F2A8-C500-184D-877E-6BADCD4F07C5}"/>
               </a:ext>
             </a:extLst>
           </p:cNvPr>
@@ -34814,14 +34927,14 @@
                 <a:gridCol w="1561629">
                   <a:extLst>
                     <a:ext uri="{9D8B030D-6E8A-4147-A177-3AD203B41FA5}">
-                      <a16:colId xmlns:a16="http://schemas.microsoft.com/office/drawing/2014/main" val="2223784943"/>
+                      <a16:colId xmlns:a16="http://schemas.microsoft.com/office/drawing/2014/main" xmlns="" val="2223784943"/>
                     </a:ext>
                   </a:extLst>
                 </a:gridCol>
                 <a:gridCol w="6144869">
                   <a:extLst>
                     <a:ext uri="{9D8B030D-6E8A-4147-A177-3AD203B41FA5}">
-                      <a16:colId xmlns:a16="http://schemas.microsoft.com/office/drawing/2014/main" val="80051659"/>
+                      <a16:colId xmlns:a16="http://schemas.microsoft.com/office/drawing/2014/main" xmlns="" val="80051659"/>
                     </a:ext>
                   </a:extLst>
                 </a:gridCol>
@@ -34861,7 +34974,7 @@
                 </a:tc>
                 <a:extLst>
                   <a:ext uri="{0D108BD9-81ED-4DB2-BD59-A6C34878D82A}">
-                    <a16:rowId xmlns:a16="http://schemas.microsoft.com/office/drawing/2014/main" val="902563454"/>
+                    <a16:rowId xmlns:a16="http://schemas.microsoft.com/office/drawing/2014/main" xmlns="" val="902563454"/>
                   </a:ext>
                 </a:extLst>
               </a:tr>
@@ -34942,7 +35055,7 @@
                 </a:tc>
                 <a:extLst>
                   <a:ext uri="{0D108BD9-81ED-4DB2-BD59-A6C34878D82A}">
-                    <a16:rowId xmlns:a16="http://schemas.microsoft.com/office/drawing/2014/main" val="4000291324"/>
+                    <a16:rowId xmlns:a16="http://schemas.microsoft.com/office/drawing/2014/main" xmlns="" val="4000291324"/>
                   </a:ext>
                 </a:extLst>
               </a:tr>
@@ -34999,7 +35112,7 @@
                 </a:tc>
                 <a:extLst>
                   <a:ext uri="{0D108BD9-81ED-4DB2-BD59-A6C34878D82A}">
-                    <a16:rowId xmlns:a16="http://schemas.microsoft.com/office/drawing/2014/main" val="4232877066"/>
+                    <a16:rowId xmlns:a16="http://schemas.microsoft.com/office/drawing/2014/main" xmlns="" val="4232877066"/>
                   </a:ext>
                 </a:extLst>
               </a:tr>
@@ -35054,7 +35167,7 @@
           <p:cNvPr id="3" name="Title 2">
             <a:extLst>
               <a:ext uri="{FF2B5EF4-FFF2-40B4-BE49-F238E27FC236}">
-                <a16:creationId xmlns:a16="http://schemas.microsoft.com/office/drawing/2014/main" id="{C02AA8F8-1E43-384B-8982-C0BB94049B5C}"/>
+                <a16:creationId xmlns:a16="http://schemas.microsoft.com/office/drawing/2014/main" xmlns="" id="{C02AA8F8-1E43-384B-8982-C0BB94049B5C}"/>
               </a:ext>
             </a:extLst>
           </p:cNvPr>
@@ -35079,6 +35192,10 @@
               <a:rPr lang="en-US" sz="1600" dirty="0"/>
               <a:t>Switch Speeds and Forwarding Methods</a:t>
             </a:r>
+            <a:r>
+              <a:rPr lang="en-US" dirty="0"/>
+              <a:t/>
+            </a:r>
             <a:br>
               <a:rPr lang="en-US" dirty="0"/>
             </a:br>
@@ -35094,7 +35211,7 @@
           <p:cNvPr id="4" name="Content Placeholder 3">
             <a:extLst>
               <a:ext uri="{FF2B5EF4-FFF2-40B4-BE49-F238E27FC236}">
-                <a16:creationId xmlns:a16="http://schemas.microsoft.com/office/drawing/2014/main" id="{1F3CA7BB-7E7C-7149-9859-4AA0DDEC8CC4}"/>
+                <a16:creationId xmlns:a16="http://schemas.microsoft.com/office/drawing/2014/main" xmlns="" id="{1F3CA7BB-7E7C-7149-9859-4AA0DDEC8CC4}"/>
               </a:ext>
             </a:extLst>
           </p:cNvPr>
@@ -35283,7 +35400,7 @@
           <p:cNvPr id="3" name="Title 2">
             <a:extLst>
               <a:ext uri="{FF2B5EF4-FFF2-40B4-BE49-F238E27FC236}">
-                <a16:creationId xmlns:a16="http://schemas.microsoft.com/office/drawing/2014/main" id="{C02AA8F8-1E43-384B-8982-C0BB94049B5C}"/>
+                <a16:creationId xmlns:a16="http://schemas.microsoft.com/office/drawing/2014/main" xmlns="" id="{C02AA8F8-1E43-384B-8982-C0BB94049B5C}"/>
               </a:ext>
             </a:extLst>
           </p:cNvPr>
@@ -35308,6 +35425,10 @@
               <a:rPr lang="en-US" sz="1600" dirty="0"/>
               <a:t>Switch Speeds and Forwarding Methods</a:t>
             </a:r>
+            <a:r>
+              <a:rPr lang="en-US" dirty="0"/>
+              <a:t/>
+            </a:r>
             <a:br>
               <a:rPr lang="en-US" dirty="0"/>
             </a:br>
@@ -35323,7 +35444,7 @@
           <p:cNvPr id="5" name="Content Placeholder 4">
             <a:extLst>
               <a:ext uri="{FF2B5EF4-FFF2-40B4-BE49-F238E27FC236}">
-                <a16:creationId xmlns:a16="http://schemas.microsoft.com/office/drawing/2014/main" id="{EAF5B935-3345-4044-9B1C-FFAA3841A95F}"/>
+                <a16:creationId xmlns:a16="http://schemas.microsoft.com/office/drawing/2014/main" xmlns="" id="{EAF5B935-3345-4044-9B1C-FFAA3841A95F}"/>
               </a:ext>
             </a:extLst>
           </p:cNvPr>
@@ -35392,7 +35513,7 @@
           <p:cNvPr id="7" name="Picture 6">
             <a:extLst>
               <a:ext uri="{FF2B5EF4-FFF2-40B4-BE49-F238E27FC236}">
-                <a16:creationId xmlns:a16="http://schemas.microsoft.com/office/drawing/2014/main" id="{E391F5F5-84B2-074A-ADD6-27895E0506BE}"/>
+                <a16:creationId xmlns:a16="http://schemas.microsoft.com/office/drawing/2014/main" xmlns="" id="{E391F5F5-84B2-074A-ADD6-27895E0506BE}"/>
               </a:ext>
             </a:extLst>
           </p:cNvPr>
@@ -35464,7 +35585,7 @@
           <p:cNvPr id="4" name="Content Placeholder 3">
             <a:extLst>
               <a:ext uri="{FF2B5EF4-FFF2-40B4-BE49-F238E27FC236}">
-                <a16:creationId xmlns:a16="http://schemas.microsoft.com/office/drawing/2014/main" id="{DDD52CCD-9D1E-4CC4-815A-A5967A0831D9}"/>
+                <a16:creationId xmlns:a16="http://schemas.microsoft.com/office/drawing/2014/main" xmlns="" id="{DDD52CCD-9D1E-4CC4-815A-A5967A0831D9}"/>
               </a:ext>
             </a:extLst>
           </p:cNvPr>
@@ -35489,14 +35610,14 @@
                 <a:gridCol w="2178265">
                   <a:extLst>
                     <a:ext uri="{9D8B030D-6E8A-4147-A177-3AD203B41FA5}">
-                      <a16:colId xmlns:a16="http://schemas.microsoft.com/office/drawing/2014/main" val="3215831619"/>
+                      <a16:colId xmlns:a16="http://schemas.microsoft.com/office/drawing/2014/main" xmlns="" val="3215831619"/>
                     </a:ext>
                   </a:extLst>
                 </a:gridCol>
                 <a:gridCol w="6416970">
                   <a:extLst>
                     <a:ext uri="{9D8B030D-6E8A-4147-A177-3AD203B41FA5}">
-                      <a16:colId xmlns:a16="http://schemas.microsoft.com/office/drawing/2014/main" val="276475465"/>
+                      <a16:colId xmlns:a16="http://schemas.microsoft.com/office/drawing/2014/main" xmlns="" val="276475465"/>
                     </a:ext>
                   </a:extLst>
                 </a:gridCol>
@@ -35537,7 +35658,7 @@
                 </a:tc>
                 <a:extLst>
                   <a:ext uri="{0D108BD9-81ED-4DB2-BD59-A6C34878D82A}">
-                    <a16:rowId xmlns:a16="http://schemas.microsoft.com/office/drawing/2014/main" val="3768427975"/>
+                    <a16:rowId xmlns:a16="http://schemas.microsoft.com/office/drawing/2014/main" xmlns="" val="3768427975"/>
                   </a:ext>
                 </a:extLst>
               </a:tr>
@@ -35577,7 +35698,7 @@
                 </a:tc>
                 <a:extLst>
                   <a:ext uri="{0D108BD9-81ED-4DB2-BD59-A6C34878D82A}">
-                    <a16:rowId xmlns:a16="http://schemas.microsoft.com/office/drawing/2014/main" val="2258594367"/>
+                    <a16:rowId xmlns:a16="http://schemas.microsoft.com/office/drawing/2014/main" xmlns="" val="2258594367"/>
                   </a:ext>
                 </a:extLst>
               </a:tr>
@@ -35643,7 +35764,7 @@
                 </a:tc>
                 <a:extLst>
                   <a:ext uri="{0D108BD9-81ED-4DB2-BD59-A6C34878D82A}">
-                    <a16:rowId xmlns:a16="http://schemas.microsoft.com/office/drawing/2014/main" val="1125566603"/>
+                    <a16:rowId xmlns:a16="http://schemas.microsoft.com/office/drawing/2014/main" xmlns="" val="1125566603"/>
                   </a:ext>
                 </a:extLst>
               </a:tr>
@@ -35683,7 +35804,7 @@
                 </a:tc>
                 <a:extLst>
                   <a:ext uri="{0D108BD9-81ED-4DB2-BD59-A6C34878D82A}">
-                    <a16:rowId xmlns:a16="http://schemas.microsoft.com/office/drawing/2014/main" val="831502776"/>
+                    <a16:rowId xmlns:a16="http://schemas.microsoft.com/office/drawing/2014/main" xmlns="" val="831502776"/>
                   </a:ext>
                 </a:extLst>
               </a:tr>
@@ -35723,7 +35844,7 @@
                 </a:tc>
                 <a:extLst>
                   <a:ext uri="{0D108BD9-81ED-4DB2-BD59-A6C34878D82A}">
-                    <a16:rowId xmlns:a16="http://schemas.microsoft.com/office/drawing/2014/main" val="2267046280"/>
+                    <a16:rowId xmlns:a16="http://schemas.microsoft.com/office/drawing/2014/main" xmlns="" val="2267046280"/>
                   </a:ext>
                 </a:extLst>
               </a:tr>
@@ -35736,7 +35857,7 @@
           <p:cNvPr id="5" name="Title 2">
             <a:extLst>
               <a:ext uri="{FF2B5EF4-FFF2-40B4-BE49-F238E27FC236}">
-                <a16:creationId xmlns:a16="http://schemas.microsoft.com/office/drawing/2014/main" id="{2D10C50B-ED86-4E5D-BD0F-658911DFEF9B}"/>
+                <a16:creationId xmlns:a16="http://schemas.microsoft.com/office/drawing/2014/main" xmlns="" id="{2D10C50B-ED86-4E5D-BD0F-658911DFEF9B}"/>
               </a:ext>
             </a:extLst>
           </p:cNvPr>
@@ -35769,7 +35890,7 @@
           <p:cNvPr id="6" name="Content Placeholder 1">
             <a:extLst>
               <a:ext uri="{FF2B5EF4-FFF2-40B4-BE49-F238E27FC236}">
-                <a16:creationId xmlns:a16="http://schemas.microsoft.com/office/drawing/2014/main" id="{031D3D35-BC84-421A-A5F0-48081A310F8E}"/>
+                <a16:creationId xmlns:a16="http://schemas.microsoft.com/office/drawing/2014/main" xmlns="" id="{031D3D35-BC84-421A-A5F0-48081A310F8E}"/>
               </a:ext>
             </a:extLst>
           </p:cNvPr>
@@ -36050,7 +36171,7 @@
           <p:cNvPr id="3" name="Title 2">
             <a:extLst>
               <a:ext uri="{FF2B5EF4-FFF2-40B4-BE49-F238E27FC236}">
-                <a16:creationId xmlns:a16="http://schemas.microsoft.com/office/drawing/2014/main" id="{C02AA8F8-1E43-384B-8982-C0BB94049B5C}"/>
+                <a16:creationId xmlns:a16="http://schemas.microsoft.com/office/drawing/2014/main" xmlns="" id="{C02AA8F8-1E43-384B-8982-C0BB94049B5C}"/>
               </a:ext>
             </a:extLst>
           </p:cNvPr>
@@ -36075,6 +36196,10 @@
               <a:rPr lang="en-US" sz="1600" dirty="0"/>
               <a:t>Switch Speeds and Forwarding Methods</a:t>
             </a:r>
+            <a:r>
+              <a:rPr lang="en-US" dirty="0"/>
+              <a:t/>
+            </a:r>
             <a:br>
               <a:rPr lang="en-US" dirty="0"/>
             </a:br>
@@ -36090,7 +36215,7 @@
           <p:cNvPr id="4" name="Content Placeholder 3">
             <a:extLst>
               <a:ext uri="{FF2B5EF4-FFF2-40B4-BE49-F238E27FC236}">
-                <a16:creationId xmlns:a16="http://schemas.microsoft.com/office/drawing/2014/main" id="{1F3CA7BB-7E7C-7149-9859-4AA0DDEC8CC4}"/>
+                <a16:creationId xmlns:a16="http://schemas.microsoft.com/office/drawing/2014/main" xmlns="" id="{1F3CA7BB-7E7C-7149-9859-4AA0DDEC8CC4}"/>
               </a:ext>
             </a:extLst>
           </p:cNvPr>
@@ -36352,6 +36477,12 @@
               </a:rPr>
               <a:t>Module Practice and Quiz</a:t>
             </a:r>
+            <a:r>
+              <a:rPr lang="en-US" dirty="0">
+                <a:latin typeface="Arial" charset="0"/>
+              </a:rPr>
+              <a:t/>
+            </a:r>
             <a:br>
               <a:rPr lang="en-US" dirty="0">
                 <a:latin typeface="Arial" charset="0"/>
@@ -36371,7 +36502,7 @@
           <p:cNvPr id="3" name="Content Placeholder 2">
             <a:extLst>
               <a:ext uri="{FF2B5EF4-FFF2-40B4-BE49-F238E27FC236}">
-                <a16:creationId xmlns:a16="http://schemas.microsoft.com/office/drawing/2014/main" id="{D93A55FA-1939-6742-B7CE-57C0035303DD}"/>
+                <a16:creationId xmlns:a16="http://schemas.microsoft.com/office/drawing/2014/main" xmlns="" id="{D93A55FA-1939-6742-B7CE-57C0035303DD}"/>
               </a:ext>
             </a:extLst>
           </p:cNvPr>
@@ -36541,6 +36672,12 @@
               </a:rPr>
               <a:t>Module Practice and Quiz</a:t>
             </a:r>
+            <a:r>
+              <a:rPr lang="en-US" dirty="0">
+                <a:latin typeface="Arial" charset="0"/>
+              </a:rPr>
+              <a:t/>
+            </a:r>
             <a:br>
               <a:rPr lang="en-US" dirty="0">
                 <a:latin typeface="Arial" charset="0"/>
@@ -36560,7 +36697,7 @@
           <p:cNvPr id="3" name="Content Placeholder 2">
             <a:extLst>
               <a:ext uri="{FF2B5EF4-FFF2-40B4-BE49-F238E27FC236}">
-                <a16:creationId xmlns:a16="http://schemas.microsoft.com/office/drawing/2014/main" id="{D93A55FA-1939-6742-B7CE-57C0035303DD}"/>
+                <a16:creationId xmlns:a16="http://schemas.microsoft.com/office/drawing/2014/main" xmlns="" id="{D93A55FA-1939-6742-B7CE-57C0035303DD}"/>
               </a:ext>
             </a:extLst>
           </p:cNvPr>
@@ -36736,6 +36873,12 @@
               </a:rPr>
               <a:t>Module 7: Ethernet Switching</a:t>
             </a:r>
+            <a:r>
+              <a:rPr lang="en-US" dirty="0">
+                <a:latin typeface="Arial" charset="0"/>
+              </a:rPr>
+              <a:t/>
+            </a:r>
             <a:br>
               <a:rPr lang="en-US" dirty="0">
                 <a:latin typeface="Arial" charset="0"/>
@@ -36755,7 +36898,7 @@
           <p:cNvPr id="2" name="Content Placeholder 1">
             <a:extLst>
               <a:ext uri="{FF2B5EF4-FFF2-40B4-BE49-F238E27FC236}">
-                <a16:creationId xmlns:a16="http://schemas.microsoft.com/office/drawing/2014/main" id="{C3353614-7F17-DC4C-A95A-616BC6DF8431}"/>
+                <a16:creationId xmlns:a16="http://schemas.microsoft.com/office/drawing/2014/main" xmlns="" id="{C3353614-7F17-DC4C-A95A-616BC6DF8431}"/>
               </a:ext>
             </a:extLst>
           </p:cNvPr>
@@ -37204,28 +37347,28 @@
                 <a:gridCol w="1129733">
                   <a:extLst>
                     <a:ext uri="{9D8B030D-6E8A-4147-A177-3AD203B41FA5}">
-                      <a16:colId xmlns:a16="http://schemas.microsoft.com/office/drawing/2014/main" val="20001"/>
+                      <a16:colId xmlns:a16="http://schemas.microsoft.com/office/drawing/2014/main" xmlns="" val="20001"/>
                     </a:ext>
                   </a:extLst>
                 </a:gridCol>
                 <a:gridCol w="1857736">
                   <a:extLst>
                     <a:ext uri="{9D8B030D-6E8A-4147-A177-3AD203B41FA5}">
-                      <a16:colId xmlns:a16="http://schemas.microsoft.com/office/drawing/2014/main" val="3156509146"/>
+                      <a16:colId xmlns:a16="http://schemas.microsoft.com/office/drawing/2014/main" xmlns="" val="3156509146"/>
                     </a:ext>
                   </a:extLst>
                 </a:gridCol>
                 <a:gridCol w="4080076">
                   <a:extLst>
                     <a:ext uri="{9D8B030D-6E8A-4147-A177-3AD203B41FA5}">
-                      <a16:colId xmlns:a16="http://schemas.microsoft.com/office/drawing/2014/main" val="20002"/>
+                      <a16:colId xmlns:a16="http://schemas.microsoft.com/office/drawing/2014/main" xmlns="" val="20002"/>
                     </a:ext>
                   </a:extLst>
                 </a:gridCol>
                 <a:gridCol w="1161873">
                   <a:extLst>
                     <a:ext uri="{9D8B030D-6E8A-4147-A177-3AD203B41FA5}">
-                      <a16:colId xmlns:a16="http://schemas.microsoft.com/office/drawing/2014/main" val="20003"/>
+                      <a16:colId xmlns:a16="http://schemas.microsoft.com/office/drawing/2014/main" xmlns="" val="20003"/>
                     </a:ext>
                   </a:extLst>
                 </a:gridCol>
@@ -37319,7 +37462,7 @@
                 </a:tc>
                 <a:extLst>
                   <a:ext uri="{0D108BD9-81ED-4DB2-BD59-A6C34878D82A}">
-                    <a16:rowId xmlns:a16="http://schemas.microsoft.com/office/drawing/2014/main" val="10000"/>
+                    <a16:rowId xmlns:a16="http://schemas.microsoft.com/office/drawing/2014/main" xmlns="" val="10000"/>
                   </a:ext>
                 </a:extLst>
               </a:tr>
@@ -37412,7 +37555,7 @@
                 </a:tc>
                 <a:extLst>
                   <a:ext uri="{0D108BD9-81ED-4DB2-BD59-A6C34878D82A}">
-                    <a16:rowId xmlns:a16="http://schemas.microsoft.com/office/drawing/2014/main" val="10001"/>
+                    <a16:rowId xmlns:a16="http://schemas.microsoft.com/office/drawing/2014/main" xmlns="" val="10001"/>
                   </a:ext>
                 </a:extLst>
               </a:tr>
@@ -37505,7 +37648,7 @@
                 </a:tc>
                 <a:extLst>
                   <a:ext uri="{0D108BD9-81ED-4DB2-BD59-A6C34878D82A}">
-                    <a16:rowId xmlns:a16="http://schemas.microsoft.com/office/drawing/2014/main" val="10006"/>
+                    <a16:rowId xmlns:a16="http://schemas.microsoft.com/office/drawing/2014/main" xmlns="" val="10006"/>
                   </a:ext>
                 </a:extLst>
               </a:tr>
@@ -37652,7 +37795,7 @@
                 </a:tc>
                 <a:extLst>
                   <a:ext uri="{0D108BD9-81ED-4DB2-BD59-A6C34878D82A}">
-                    <a16:rowId xmlns:a16="http://schemas.microsoft.com/office/drawing/2014/main" val="10008"/>
+                    <a16:rowId xmlns:a16="http://schemas.microsoft.com/office/drawing/2014/main" xmlns="" val="10008"/>
                   </a:ext>
                 </a:extLst>
               </a:tr>
@@ -37799,7 +37942,7 @@
                 </a:tc>
                 <a:extLst>
                   <a:ext uri="{0D108BD9-81ED-4DB2-BD59-A6C34878D82A}">
-                    <a16:rowId xmlns:a16="http://schemas.microsoft.com/office/drawing/2014/main" val="2582900979"/>
+                    <a16:rowId xmlns:a16="http://schemas.microsoft.com/office/drawing/2014/main" xmlns="" val="2582900979"/>
                   </a:ext>
                 </a:extLst>
               </a:tr>
@@ -37946,7 +38089,7 @@
                 </a:tc>
                 <a:extLst>
                   <a:ext uri="{0D108BD9-81ED-4DB2-BD59-A6C34878D82A}">
-                    <a16:rowId xmlns:a16="http://schemas.microsoft.com/office/drawing/2014/main" val="3522544737"/>
+                    <a16:rowId xmlns:a16="http://schemas.microsoft.com/office/drawing/2014/main" xmlns="" val="3522544737"/>
                   </a:ext>
                 </a:extLst>
               </a:tr>
@@ -38093,7 +38236,7 @@
                 </a:tc>
                 <a:extLst>
                   <a:ext uri="{0D108BD9-81ED-4DB2-BD59-A6C34878D82A}">
-                    <a16:rowId xmlns:a16="http://schemas.microsoft.com/office/drawing/2014/main" val="3001172460"/>
+                    <a16:rowId xmlns:a16="http://schemas.microsoft.com/office/drawing/2014/main" xmlns="" val="3001172460"/>
                   </a:ext>
                 </a:extLst>
               </a:tr>
@@ -38240,7 +38383,7 @@
                 </a:tc>
                 <a:extLst>
                   <a:ext uri="{0D108BD9-81ED-4DB2-BD59-A6C34878D82A}">
-                    <a16:rowId xmlns:a16="http://schemas.microsoft.com/office/drawing/2014/main" val="322206681"/>
+                    <a16:rowId xmlns:a16="http://schemas.microsoft.com/office/drawing/2014/main" xmlns="" val="322206681"/>
                   </a:ext>
                 </a:extLst>
               </a:tr>
@@ -38387,7 +38530,7 @@
                 </a:tc>
                 <a:extLst>
                   <a:ext uri="{0D108BD9-81ED-4DB2-BD59-A6C34878D82A}">
-                    <a16:rowId xmlns:a16="http://schemas.microsoft.com/office/drawing/2014/main" val="3406068602"/>
+                    <a16:rowId xmlns:a16="http://schemas.microsoft.com/office/drawing/2014/main" xmlns="" val="3406068602"/>
                   </a:ext>
                 </a:extLst>
               </a:tr>
@@ -38523,7 +38666,7 @@
                 </a:tc>
                 <a:extLst>
                   <a:ext uri="{0D108BD9-81ED-4DB2-BD59-A6C34878D82A}">
-                    <a16:rowId xmlns:a16="http://schemas.microsoft.com/office/drawing/2014/main" val="3586367858"/>
+                    <a16:rowId xmlns:a16="http://schemas.microsoft.com/office/drawing/2014/main" xmlns="" val="3586367858"/>
                   </a:ext>
                 </a:extLst>
               </a:tr>
@@ -40073,6 +40216,15 @@
 </file>
 
 <file path=customXml/item1.xml><?xml version="1.0" encoding="utf-8"?>
+<?mso-contentType ?>
+<FormTemplates xmlns="http://schemas.microsoft.com/sharepoint/v3/contenttype/forms">
+  <Display>DocumentLibraryForm</Display>
+  <Edit>DocumentLibraryForm</Edit>
+  <New>DocumentLibraryForm</New>
+</FormTemplates>
+</file>
+
+<file path=customXml/item2.xml><?xml version="1.0" encoding="utf-8"?>
 <ct:contentTypeSchema xmlns:ct="http://schemas.microsoft.com/office/2006/metadata/contentType" xmlns:ma="http://schemas.microsoft.com/office/2006/metadata/properties/metaAttributes" ct:_="" ma:_="" ma:contentTypeName="Document" ma:contentTypeID="0x01010001F18ECBD8ED834DABF5ACC3DB9AA918" ma:contentTypeVersion="19" ma:contentTypeDescription="Create a new document." ma:contentTypeScope="" ma:versionID="0375978224eca4aeb78b7ba86ac1033c">
   <xsd:schema xmlns:xsd="http://www.w3.org/2001/XMLSchema" xmlns:xs="http://www.w3.org/2001/XMLSchema" xmlns:p="http://schemas.microsoft.com/office/2006/metadata/properties" xmlns:ns2="810553ce-449d-4340-bb0a-414d416a9b51" xmlns:ns3="20a0b39e-fcd0-423b-9f17-9d26d967be51" targetNamespace="http://schemas.microsoft.com/office/2006/metadata/properties" ma:root="true" ma:fieldsID="457d9a46ed9cd6c2ce95cb3d449ba463" ns2:_="" ns3:_="">
     <xsd:import namespace="810553ce-449d-4340-bb0a-414d416a9b51"/>
@@ -40329,15 +40481,6 @@
 </ct:contentTypeSchema>
 </file>
 
-<file path=customXml/item2.xml><?xml version="1.0" encoding="utf-8"?>
-<?mso-contentType ?>
-<FormTemplates xmlns="http://schemas.microsoft.com/sharepoint/v3/contenttype/forms">
-  <Display>DocumentLibraryForm</Display>
-  <Edit>DocumentLibraryForm</Edit>
-  <New>DocumentLibraryForm</New>
-</FormTemplates>
-</file>
-
 <file path=customXml/item3.xml><?xml version="1.0" encoding="utf-8"?>
 <p:properties xmlns:p="http://schemas.microsoft.com/office/2006/metadata/properties" xmlns:xsi="http://www.w3.org/2001/XMLSchema-instance" xmlns:pc="http://schemas.microsoft.com/office/infopath/2007/PartnerControls">
   <documentManagement>
@@ -40351,13 +40494,39 @@
 </file>
 
 <file path=customXml/itemProps1.xml><?xml version="1.0" encoding="utf-8"?>
-<ds:datastoreItem xmlns:ds="http://schemas.openxmlformats.org/officeDocument/2006/customXml" ds:itemID="{7796DF93-3B93-49D0-BD02-AED37740B3F7}"/>
+<ds:datastoreItem xmlns:ds="http://schemas.openxmlformats.org/officeDocument/2006/customXml" ds:itemID="{63C8E68F-69F9-4377-8D4B-E3CFA5CCA038}">
+  <ds:schemaRefs>
+    <ds:schemaRef ds:uri="http://schemas.microsoft.com/sharepoint/v3/contenttype/forms"/>
+  </ds:schemaRefs>
+</ds:datastoreItem>
 </file>
 
 <file path=customXml/itemProps2.xml><?xml version="1.0" encoding="utf-8"?>
-<ds:datastoreItem xmlns:ds="http://schemas.openxmlformats.org/officeDocument/2006/customXml" ds:itemID="{63C8E68F-69F9-4377-8D4B-E3CFA5CCA038}"/>
+<ds:datastoreItem xmlns:ds="http://schemas.openxmlformats.org/officeDocument/2006/customXml" ds:itemID="{7796DF93-3B93-49D0-BD02-AED37740B3F7}">
+  <ds:schemaRefs>
+    <ds:schemaRef ds:uri="http://schemas.microsoft.com/office/2006/metadata/contentType"/>
+    <ds:schemaRef ds:uri="http://schemas.microsoft.com/office/2006/metadata/properties/metaAttributes"/>
+    <ds:schemaRef ds:uri="http://www.w3.org/2001/XMLSchema"/>
+    <ds:schemaRef ds:uri="http://schemas.microsoft.com/office/2006/metadata/properties"/>
+    <ds:schemaRef ds:uri="810553ce-449d-4340-bb0a-414d416a9b51"/>
+    <ds:schemaRef ds:uri="20a0b39e-fcd0-423b-9f17-9d26d967be51"/>
+    <ds:schemaRef ds:uri="http://schemas.microsoft.com/office/2006/documentManagement/types"/>
+    <ds:schemaRef ds:uri="http://schemas.microsoft.com/office/infopath/2007/PartnerControls"/>
+    <ds:schemaRef ds:uri="http://schemas.openxmlformats.org/package/2006/metadata/core-properties"/>
+    <ds:schemaRef ds:uri="http://purl.org/dc/elements/1.1/"/>
+    <ds:schemaRef ds:uri="http://purl.org/dc/terms/"/>
+    <ds:schemaRef ds:uri="http://schemas.microsoft.com/internal/obd"/>
+  </ds:schemaRefs>
+</ds:datastoreItem>
 </file>
 
 <file path=customXml/itemProps3.xml><?xml version="1.0" encoding="utf-8"?>
-<ds:datastoreItem xmlns:ds="http://schemas.openxmlformats.org/officeDocument/2006/customXml" ds:itemID="{6173D041-57CC-405F-A9CD-0BF959E410A0}"/>
+<ds:datastoreItem xmlns:ds="http://schemas.openxmlformats.org/officeDocument/2006/customXml" ds:itemID="{6173D041-57CC-405F-A9CD-0BF959E410A0}">
+  <ds:schemaRefs>
+    <ds:schemaRef ds:uri="http://schemas.microsoft.com/office/2006/metadata/properties"/>
+    <ds:schemaRef ds:uri="http://schemas.microsoft.com/office/infopath/2007/PartnerControls"/>
+    <ds:schemaRef ds:uri="810553ce-449d-4340-bb0a-414d416a9b51"/>
+    <ds:schemaRef ds:uri="20a0b39e-fcd0-423b-9f17-9d26d967be51"/>
+  </ds:schemaRefs>
+</ds:datastoreItem>
 </file>